--- a/docs/議事録タブ_操作マニュアル.pptx
+++ b/docs/議事録タブ_操作マニュアル.pptx
@@ -5,17 +5,17 @@
     <p:sldMasterId id="2147483648" r:id="rId1"/>
   </p:sldMasterIdLst>
   <p:sldIdLst>
-    <p:sldId id="256" r:id="rId2"/>
-    <p:sldId id="257" r:id="rId3"/>
-    <p:sldId id="258" r:id="rId4"/>
-    <p:sldId id="259" r:id="rId5"/>
-    <p:sldId id="260" r:id="rId6"/>
-    <p:sldId id="261" r:id="rId7"/>
-    <p:sldId id="262" r:id="rId8"/>
-    <p:sldId id="263" r:id="rId9"/>
-    <p:sldId id="264" r:id="rId10"/>
+    <p:sldId id="256" r:id="rId7"/>
+    <p:sldId id="257" r:id="rId8"/>
+    <p:sldId id="258" r:id="rId9"/>
+    <p:sldId id="259" r:id="rId10"/>
+    <p:sldId id="260" r:id="rId11"/>
+    <p:sldId id="261" r:id="rId12"/>
+    <p:sldId id="262" r:id="rId13"/>
+    <p:sldId id="263" r:id="rId14"/>
+    <p:sldId id="264" r:id="rId15"/>
   </p:sldIdLst>
-  <p:sldSz cx="12188825" cy="6858000"/>
+  <p:sldSz cx="12188952" cy="6858000" type="screen4x3"/>
   <p:notesSz cx="6858000" cy="9144000"/>
   <p:defaultTextStyle>
     <a:defPPr>
@@ -112,22 +112,6 @@
       </a:defRPr>
     </a:lvl9pPr>
   </p:defaultTextStyle>
-  <p:extLst>
-    <p:ext uri="{EFAFB233-063F-42B5-8137-9DF3F51BA10A}">
-      <p15:sldGuideLst xmlns:p15="http://schemas.microsoft.com/office/powerpoint/2012/main">
-        <p15:guide id="1" orient="horz" pos="2160">
-          <p15:clr>
-            <a:srgbClr val="A4A3A4"/>
-          </p15:clr>
-        </p15:guide>
-        <p15:guide id="2" pos="2880">
-          <p15:clr>
-            <a:srgbClr val="A4A3A4"/>
-          </p15:clr>
-        </p15:guide>
-      </p15:sldGuideLst>
-    </p:ext>
-  </p:extLst>
 </p:presentation>
 </file>
 
@@ -169,9 +153,10 @@
           <a:lstStyle/>
           <a:p>
             <a:r>
-              <a:rPr lang="en-US"/>
+              <a:rPr lang="en-US" smtClean="0"/>
               <a:t>Click to edit Master title style</a:t>
             </a:r>
+            <a:endParaRPr lang="en-US"/>
           </a:p>
         </p:txBody>
       </p:sp>
@@ -287,9 +272,10 @@
           </a:lstStyle>
           <a:p>
             <a:r>
-              <a:rPr lang="en-US"/>
+              <a:rPr lang="en-US" smtClean="0"/>
               <a:t>Click to edit Master subtitle style</a:t>
             </a:r>
+            <a:endParaRPr lang="en-US"/>
           </a:p>
         </p:txBody>
       </p:sp>
@@ -310,7 +296,7 @@
           <a:p>
             <a:fld id="{5BCAD085-E8A6-8845-BD4E-CB4CCA059FC4}" type="datetimeFigureOut">
               <a:rPr lang="en-US" smtClean="0"/>
-              <a:t>7/9/2026</a:t>
+              <a:t>1/27/13</a:t>
             </a:fld>
             <a:endParaRPr lang="en-US"/>
           </a:p>
@@ -404,9 +390,10 @@
           <a:lstStyle/>
           <a:p>
             <a:r>
-              <a:rPr lang="en-US"/>
+              <a:rPr lang="en-US" smtClean="0"/>
               <a:t>Click to edit Master title style</a:t>
             </a:r>
+            <a:endParaRPr lang="en-US"/>
           </a:p>
         </p:txBody>
       </p:sp>
@@ -427,37 +414,38 @@
           <a:p>
             <a:pPr lvl="0"/>
             <a:r>
-              <a:rPr lang="en-US"/>
+              <a:rPr lang="en-US" smtClean="0"/>
               <a:t>Click to edit Master text styles</a:t>
             </a:r>
           </a:p>
           <a:p>
             <a:pPr lvl="1"/>
             <a:r>
-              <a:rPr lang="en-US"/>
+              <a:rPr lang="en-US" smtClean="0"/>
               <a:t>Second level</a:t>
             </a:r>
           </a:p>
           <a:p>
             <a:pPr lvl="2"/>
             <a:r>
-              <a:rPr lang="en-US"/>
+              <a:rPr lang="en-US" smtClean="0"/>
               <a:t>Third level</a:t>
             </a:r>
           </a:p>
           <a:p>
             <a:pPr lvl="3"/>
             <a:r>
-              <a:rPr lang="en-US"/>
+              <a:rPr lang="en-US" smtClean="0"/>
               <a:t>Fourth level</a:t>
             </a:r>
           </a:p>
           <a:p>
             <a:pPr lvl="4"/>
             <a:r>
-              <a:rPr lang="en-US"/>
+              <a:rPr lang="en-US" smtClean="0"/>
               <a:t>Fifth level</a:t>
             </a:r>
+            <a:endParaRPr lang="en-US"/>
           </a:p>
         </p:txBody>
       </p:sp>
@@ -478,7 +466,7 @@
           <a:p>
             <a:fld id="{5BCAD085-E8A6-8845-BD4E-CB4CCA059FC4}" type="datetimeFigureOut">
               <a:rPr lang="en-US" smtClean="0"/>
-              <a:t>7/9/2026</a:t>
+              <a:t>1/27/13</a:t>
             </a:fld>
             <a:endParaRPr lang="en-US"/>
           </a:p>
@@ -577,9 +565,10 @@
           <a:lstStyle/>
           <a:p>
             <a:r>
-              <a:rPr lang="en-US"/>
+              <a:rPr lang="en-US" smtClean="0"/>
               <a:t>Click to edit Master title style</a:t>
             </a:r>
+            <a:endParaRPr lang="en-US"/>
           </a:p>
         </p:txBody>
       </p:sp>
@@ -605,37 +594,38 @@
           <a:p>
             <a:pPr lvl="0"/>
             <a:r>
-              <a:rPr lang="en-US"/>
+              <a:rPr lang="en-US" smtClean="0"/>
               <a:t>Click to edit Master text styles</a:t>
             </a:r>
           </a:p>
           <a:p>
             <a:pPr lvl="1"/>
             <a:r>
-              <a:rPr lang="en-US"/>
+              <a:rPr lang="en-US" smtClean="0"/>
               <a:t>Second level</a:t>
             </a:r>
           </a:p>
           <a:p>
             <a:pPr lvl="2"/>
             <a:r>
-              <a:rPr lang="en-US"/>
+              <a:rPr lang="en-US" smtClean="0"/>
               <a:t>Third level</a:t>
             </a:r>
           </a:p>
           <a:p>
             <a:pPr lvl="3"/>
             <a:r>
-              <a:rPr lang="en-US"/>
+              <a:rPr lang="en-US" smtClean="0"/>
               <a:t>Fourth level</a:t>
             </a:r>
           </a:p>
           <a:p>
             <a:pPr lvl="4"/>
             <a:r>
-              <a:rPr lang="en-US"/>
+              <a:rPr lang="en-US" smtClean="0"/>
               <a:t>Fifth level</a:t>
             </a:r>
+            <a:endParaRPr lang="en-US"/>
           </a:p>
         </p:txBody>
       </p:sp>
@@ -656,7 +646,7 @@
           <a:p>
             <a:fld id="{5BCAD085-E8A6-8845-BD4E-CB4CCA059FC4}" type="datetimeFigureOut">
               <a:rPr lang="en-US" smtClean="0"/>
-              <a:t>7/9/2026</a:t>
+              <a:t>1/27/13</a:t>
             </a:fld>
             <a:endParaRPr lang="en-US"/>
           </a:p>
@@ -750,9 +740,10 @@
           <a:lstStyle/>
           <a:p>
             <a:r>
-              <a:rPr lang="en-US"/>
+              <a:rPr lang="en-US" smtClean="0"/>
               <a:t>Click to edit Master title style</a:t>
             </a:r>
+            <a:endParaRPr lang="en-US"/>
           </a:p>
         </p:txBody>
       </p:sp>
@@ -773,37 +764,38 @@
           <a:p>
             <a:pPr lvl="0"/>
             <a:r>
-              <a:rPr lang="en-US"/>
+              <a:rPr lang="en-US" smtClean="0"/>
               <a:t>Click to edit Master text styles</a:t>
             </a:r>
           </a:p>
           <a:p>
             <a:pPr lvl="1"/>
             <a:r>
-              <a:rPr lang="en-US"/>
+              <a:rPr lang="en-US" smtClean="0"/>
               <a:t>Second level</a:t>
             </a:r>
           </a:p>
           <a:p>
             <a:pPr lvl="2"/>
             <a:r>
-              <a:rPr lang="en-US"/>
+              <a:rPr lang="en-US" smtClean="0"/>
               <a:t>Third level</a:t>
             </a:r>
           </a:p>
           <a:p>
             <a:pPr lvl="3"/>
             <a:r>
-              <a:rPr lang="en-US"/>
+              <a:rPr lang="en-US" smtClean="0"/>
               <a:t>Fourth level</a:t>
             </a:r>
           </a:p>
           <a:p>
             <a:pPr lvl="4"/>
             <a:r>
-              <a:rPr lang="en-US"/>
+              <a:rPr lang="en-US" smtClean="0"/>
               <a:t>Fifth level</a:t>
             </a:r>
+            <a:endParaRPr lang="en-US"/>
           </a:p>
         </p:txBody>
       </p:sp>
@@ -824,7 +816,7 @@
           <a:p>
             <a:fld id="{5BCAD085-E8A6-8845-BD4E-CB4CCA059FC4}" type="datetimeFigureOut">
               <a:rPr lang="en-US" smtClean="0"/>
-              <a:t>7/9/2026</a:t>
+              <a:t>1/27/13</a:t>
             </a:fld>
             <a:endParaRPr lang="en-US"/>
           </a:p>
@@ -927,9 +919,10 @@
           </a:lstStyle>
           <a:p>
             <a:r>
-              <a:rPr lang="en-US"/>
+              <a:rPr lang="en-US" smtClean="0"/>
               <a:t>Click to edit Master title style</a:t>
             </a:r>
+            <a:endParaRPr lang="en-US"/>
           </a:p>
         </p:txBody>
       </p:sp>
@@ -1046,7 +1039,7 @@
           <a:p>
             <a:pPr lvl="0"/>
             <a:r>
-              <a:rPr lang="en-US"/>
+              <a:rPr lang="en-US" smtClean="0"/>
               <a:t>Click to edit Master text styles</a:t>
             </a:r>
           </a:p>
@@ -1069,7 +1062,7 @@
           <a:p>
             <a:fld id="{5BCAD085-E8A6-8845-BD4E-CB4CCA059FC4}" type="datetimeFigureOut">
               <a:rPr lang="en-US" smtClean="0"/>
-              <a:t>7/9/2026</a:t>
+              <a:t>1/27/13</a:t>
             </a:fld>
             <a:endParaRPr lang="en-US"/>
           </a:p>
@@ -1163,9 +1156,10 @@
           <a:lstStyle/>
           <a:p>
             <a:r>
-              <a:rPr lang="en-US"/>
+              <a:rPr lang="en-US" smtClean="0"/>
               <a:t>Click to edit Master title style</a:t>
             </a:r>
+            <a:endParaRPr lang="en-US"/>
           </a:p>
         </p:txBody>
       </p:sp>
@@ -1219,37 +1213,38 @@
           <a:p>
             <a:pPr lvl="0"/>
             <a:r>
-              <a:rPr lang="en-US"/>
+              <a:rPr lang="en-US" smtClean="0"/>
               <a:t>Click to edit Master text styles</a:t>
             </a:r>
           </a:p>
           <a:p>
             <a:pPr lvl="1"/>
             <a:r>
-              <a:rPr lang="en-US"/>
+              <a:rPr lang="en-US" smtClean="0"/>
               <a:t>Second level</a:t>
             </a:r>
           </a:p>
           <a:p>
             <a:pPr lvl="2"/>
             <a:r>
-              <a:rPr lang="en-US"/>
+              <a:rPr lang="en-US" smtClean="0"/>
               <a:t>Third level</a:t>
             </a:r>
           </a:p>
           <a:p>
             <a:pPr lvl="3"/>
             <a:r>
-              <a:rPr lang="en-US"/>
+              <a:rPr lang="en-US" smtClean="0"/>
               <a:t>Fourth level</a:t>
             </a:r>
           </a:p>
           <a:p>
             <a:pPr lvl="4"/>
             <a:r>
-              <a:rPr lang="en-US"/>
+              <a:rPr lang="en-US" smtClean="0"/>
               <a:t>Fifth level</a:t>
             </a:r>
+            <a:endParaRPr lang="en-US"/>
           </a:p>
         </p:txBody>
       </p:sp>
@@ -1303,37 +1298,38 @@
           <a:p>
             <a:pPr lvl="0"/>
             <a:r>
-              <a:rPr lang="en-US"/>
+              <a:rPr lang="en-US" smtClean="0"/>
               <a:t>Click to edit Master text styles</a:t>
             </a:r>
           </a:p>
           <a:p>
             <a:pPr lvl="1"/>
             <a:r>
-              <a:rPr lang="en-US"/>
+              <a:rPr lang="en-US" smtClean="0"/>
               <a:t>Second level</a:t>
             </a:r>
           </a:p>
           <a:p>
             <a:pPr lvl="2"/>
             <a:r>
-              <a:rPr lang="en-US"/>
+              <a:rPr lang="en-US" smtClean="0"/>
               <a:t>Third level</a:t>
             </a:r>
           </a:p>
           <a:p>
             <a:pPr lvl="3"/>
             <a:r>
-              <a:rPr lang="en-US"/>
+              <a:rPr lang="en-US" smtClean="0"/>
               <a:t>Fourth level</a:t>
             </a:r>
           </a:p>
           <a:p>
             <a:pPr lvl="4"/>
             <a:r>
-              <a:rPr lang="en-US"/>
+              <a:rPr lang="en-US" smtClean="0"/>
               <a:t>Fifth level</a:t>
             </a:r>
+            <a:endParaRPr lang="en-US"/>
           </a:p>
         </p:txBody>
       </p:sp>
@@ -1354,7 +1350,7 @@
           <a:p>
             <a:fld id="{5BCAD085-E8A6-8845-BD4E-CB4CCA059FC4}" type="datetimeFigureOut">
               <a:rPr lang="en-US" smtClean="0"/>
-              <a:t>7/9/2026</a:t>
+              <a:t>1/27/13</a:t>
             </a:fld>
             <a:endParaRPr lang="en-US"/>
           </a:p>
@@ -1452,9 +1448,10 @@
           </a:lstStyle>
           <a:p>
             <a:r>
-              <a:rPr lang="en-US"/>
+              <a:rPr lang="en-US" smtClean="0"/>
               <a:t>Click to edit Master title style</a:t>
             </a:r>
+            <a:endParaRPr lang="en-US"/>
           </a:p>
         </p:txBody>
       </p:sp>
@@ -1517,7 +1514,7 @@
           <a:p>
             <a:pPr lvl="0"/>
             <a:r>
-              <a:rPr lang="en-US"/>
+              <a:rPr lang="en-US" smtClean="0"/>
               <a:t>Click to edit Master text styles</a:t>
             </a:r>
           </a:p>
@@ -1573,37 +1570,38 @@
           <a:p>
             <a:pPr lvl="0"/>
             <a:r>
-              <a:rPr lang="en-US"/>
+              <a:rPr lang="en-US" smtClean="0"/>
               <a:t>Click to edit Master text styles</a:t>
             </a:r>
           </a:p>
           <a:p>
             <a:pPr lvl="1"/>
             <a:r>
-              <a:rPr lang="en-US"/>
+              <a:rPr lang="en-US" smtClean="0"/>
               <a:t>Second level</a:t>
             </a:r>
           </a:p>
           <a:p>
             <a:pPr lvl="2"/>
             <a:r>
-              <a:rPr lang="en-US"/>
+              <a:rPr lang="en-US" smtClean="0"/>
               <a:t>Third level</a:t>
             </a:r>
           </a:p>
           <a:p>
             <a:pPr lvl="3"/>
             <a:r>
-              <a:rPr lang="en-US"/>
+              <a:rPr lang="en-US" smtClean="0"/>
               <a:t>Fourth level</a:t>
             </a:r>
           </a:p>
           <a:p>
             <a:pPr lvl="4"/>
             <a:r>
-              <a:rPr lang="en-US"/>
+              <a:rPr lang="en-US" smtClean="0"/>
               <a:t>Fifth level</a:t>
             </a:r>
+            <a:endParaRPr lang="en-US"/>
           </a:p>
         </p:txBody>
       </p:sp>
@@ -1666,7 +1664,7 @@
           <a:p>
             <a:pPr lvl="0"/>
             <a:r>
-              <a:rPr lang="en-US"/>
+              <a:rPr lang="en-US" smtClean="0"/>
               <a:t>Click to edit Master text styles</a:t>
             </a:r>
           </a:p>
@@ -1722,37 +1720,38 @@
           <a:p>
             <a:pPr lvl="0"/>
             <a:r>
-              <a:rPr lang="en-US"/>
+              <a:rPr lang="en-US" smtClean="0"/>
               <a:t>Click to edit Master text styles</a:t>
             </a:r>
           </a:p>
           <a:p>
             <a:pPr lvl="1"/>
             <a:r>
-              <a:rPr lang="en-US"/>
+              <a:rPr lang="en-US" smtClean="0"/>
               <a:t>Second level</a:t>
             </a:r>
           </a:p>
           <a:p>
             <a:pPr lvl="2"/>
             <a:r>
-              <a:rPr lang="en-US"/>
+              <a:rPr lang="en-US" smtClean="0"/>
               <a:t>Third level</a:t>
             </a:r>
           </a:p>
           <a:p>
             <a:pPr lvl="3"/>
             <a:r>
-              <a:rPr lang="en-US"/>
+              <a:rPr lang="en-US" smtClean="0"/>
               <a:t>Fourth level</a:t>
             </a:r>
           </a:p>
           <a:p>
             <a:pPr lvl="4"/>
             <a:r>
-              <a:rPr lang="en-US"/>
+              <a:rPr lang="en-US" smtClean="0"/>
               <a:t>Fifth level</a:t>
             </a:r>
+            <a:endParaRPr lang="en-US"/>
           </a:p>
         </p:txBody>
       </p:sp>
@@ -1773,7 +1772,7 @@
           <a:p>
             <a:fld id="{5BCAD085-E8A6-8845-BD4E-CB4CCA059FC4}" type="datetimeFigureOut">
               <a:rPr lang="en-US" smtClean="0"/>
-              <a:t>7/9/2026</a:t>
+              <a:t>1/27/13</a:t>
             </a:fld>
             <a:endParaRPr lang="en-US"/>
           </a:p>
@@ -1867,9 +1866,10 @@
           <a:lstStyle/>
           <a:p>
             <a:r>
-              <a:rPr lang="en-US"/>
+              <a:rPr lang="en-US" smtClean="0"/>
               <a:t>Click to edit Master title style</a:t>
             </a:r>
+            <a:endParaRPr lang="en-US"/>
           </a:p>
         </p:txBody>
       </p:sp>
@@ -1890,7 +1890,7 @@
           <a:p>
             <a:fld id="{5BCAD085-E8A6-8845-BD4E-CB4CCA059FC4}" type="datetimeFigureOut">
               <a:rPr lang="en-US" smtClean="0"/>
-              <a:t>7/9/2026</a:t>
+              <a:t>1/27/13</a:t>
             </a:fld>
             <a:endParaRPr lang="en-US"/>
           </a:p>
@@ -1985,7 +1985,7 @@
           <a:p>
             <a:fld id="{5BCAD085-E8A6-8845-BD4E-CB4CCA059FC4}" type="datetimeFigureOut">
               <a:rPr lang="en-US" smtClean="0"/>
-              <a:t>7/9/2026</a:t>
+              <a:t>1/27/13</a:t>
             </a:fld>
             <a:endParaRPr lang="en-US"/>
           </a:p>
@@ -2088,9 +2088,10 @@
           </a:lstStyle>
           <a:p>
             <a:r>
-              <a:rPr lang="en-US"/>
+              <a:rPr lang="en-US" smtClean="0"/>
               <a:t>Click to edit Master title style</a:t>
             </a:r>
+            <a:endParaRPr lang="en-US"/>
           </a:p>
         </p:txBody>
       </p:sp>
@@ -2144,37 +2145,38 @@
           <a:p>
             <a:pPr lvl="0"/>
             <a:r>
-              <a:rPr lang="en-US"/>
+              <a:rPr lang="en-US" smtClean="0"/>
               <a:t>Click to edit Master text styles</a:t>
             </a:r>
           </a:p>
           <a:p>
             <a:pPr lvl="1"/>
             <a:r>
-              <a:rPr lang="en-US"/>
+              <a:rPr lang="en-US" smtClean="0"/>
               <a:t>Second level</a:t>
             </a:r>
           </a:p>
           <a:p>
             <a:pPr lvl="2"/>
             <a:r>
-              <a:rPr lang="en-US"/>
+              <a:rPr lang="en-US" smtClean="0"/>
               <a:t>Third level</a:t>
             </a:r>
           </a:p>
           <a:p>
             <a:pPr lvl="3"/>
             <a:r>
-              <a:rPr lang="en-US"/>
+              <a:rPr lang="en-US" smtClean="0"/>
               <a:t>Fourth level</a:t>
             </a:r>
           </a:p>
           <a:p>
             <a:pPr lvl="4"/>
             <a:r>
-              <a:rPr lang="en-US"/>
+              <a:rPr lang="en-US" smtClean="0"/>
               <a:t>Fifth level</a:t>
             </a:r>
+            <a:endParaRPr lang="en-US"/>
           </a:p>
         </p:txBody>
       </p:sp>
@@ -2237,7 +2239,7 @@
           <a:p>
             <a:pPr lvl="0"/>
             <a:r>
-              <a:rPr lang="en-US"/>
+              <a:rPr lang="en-US" smtClean="0"/>
               <a:t>Click to edit Master text styles</a:t>
             </a:r>
           </a:p>
@@ -2260,7 +2262,7 @@
           <a:p>
             <a:fld id="{5BCAD085-E8A6-8845-BD4E-CB4CCA059FC4}" type="datetimeFigureOut">
               <a:rPr lang="en-US" smtClean="0"/>
-              <a:t>7/9/2026</a:t>
+              <a:t>1/27/13</a:t>
             </a:fld>
             <a:endParaRPr lang="en-US"/>
           </a:p>
@@ -2363,9 +2365,10 @@
           </a:lstStyle>
           <a:p>
             <a:r>
-              <a:rPr lang="en-US"/>
+              <a:rPr lang="en-US" smtClean="0"/>
               <a:t>Click to edit Master title style</a:t>
             </a:r>
+            <a:endParaRPr lang="en-US"/>
           </a:p>
         </p:txBody>
       </p:sp>
@@ -2489,7 +2492,7 @@
           <a:p>
             <a:pPr lvl="0"/>
             <a:r>
-              <a:rPr lang="en-US"/>
+              <a:rPr lang="en-US" smtClean="0"/>
               <a:t>Click to edit Master text styles</a:t>
             </a:r>
           </a:p>
@@ -2512,7 +2515,7 @@
           <a:p>
             <a:fld id="{5BCAD085-E8A6-8845-BD4E-CB4CCA059FC4}" type="datetimeFigureOut">
               <a:rPr lang="en-US" smtClean="0"/>
-              <a:t>7/9/2026</a:t>
+              <a:t>1/27/13</a:t>
             </a:fld>
             <a:endParaRPr lang="en-US"/>
           </a:p>
@@ -2621,9 +2624,10 @@
           <a:lstStyle/>
           <a:p>
             <a:r>
-              <a:rPr lang="en-US"/>
+              <a:rPr lang="en-US" smtClean="0"/>
               <a:t>Click to edit Master title style</a:t>
             </a:r>
+            <a:endParaRPr lang="en-US"/>
           </a:p>
         </p:txBody>
       </p:sp>
@@ -2654,37 +2658,38 @@
           <a:p>
             <a:pPr lvl="0"/>
             <a:r>
-              <a:rPr lang="en-US"/>
+              <a:rPr lang="en-US" smtClean="0"/>
               <a:t>Click to edit Master text styles</a:t>
             </a:r>
           </a:p>
           <a:p>
             <a:pPr lvl="1"/>
             <a:r>
-              <a:rPr lang="en-US"/>
+              <a:rPr lang="en-US" smtClean="0"/>
               <a:t>Second level</a:t>
             </a:r>
           </a:p>
           <a:p>
             <a:pPr lvl="2"/>
             <a:r>
-              <a:rPr lang="en-US"/>
+              <a:rPr lang="en-US" smtClean="0"/>
               <a:t>Third level</a:t>
             </a:r>
           </a:p>
           <a:p>
             <a:pPr lvl="3"/>
             <a:r>
-              <a:rPr lang="en-US"/>
+              <a:rPr lang="en-US" smtClean="0"/>
               <a:t>Fourth level</a:t>
             </a:r>
           </a:p>
           <a:p>
             <a:pPr lvl="4"/>
             <a:r>
-              <a:rPr lang="en-US"/>
+              <a:rPr lang="en-US" smtClean="0"/>
               <a:t>Fifth level</a:t>
             </a:r>
+            <a:endParaRPr lang="en-US"/>
           </a:p>
         </p:txBody>
       </p:sp>
@@ -2723,7 +2728,7 @@
           <a:p>
             <a:fld id="{5BCAD085-E8A6-8845-BD4E-CB4CCA059FC4}" type="datetimeFigureOut">
               <a:rPr lang="en-US" smtClean="0"/>
-              <a:t>7/9/2026</a:t>
+              <a:t>1/27/13</a:t>
             </a:fld>
             <a:endParaRPr lang="en-US"/>
           </a:p>
@@ -3082,7 +3087,7 @@
 </file>
 
 <file path=ppt/slides/slide1.xml><?xml version="1.0" encoding="utf-8"?>
-<p:sld xmlns:a="http://schemas.openxmlformats.org/drawingml/2006/main" xmlns:r="http://schemas.openxmlformats.org/officeDocument/2006/relationships" xmlns:p="http://schemas.openxmlformats.org/presentationml/2006/main">
+<p:sld xmlns:a="http://schemas.openxmlformats.org/drawingml/2006/main" xmlns:p="http://schemas.openxmlformats.org/presentationml/2006/main" xmlns:r="http://schemas.openxmlformats.org/officeDocument/2006/relationships">
   <p:cSld>
     <p:spTree>
       <p:nvGrpSpPr>
@@ -3090,14 +3095,7 @@
         <p:cNvGrpSpPr/>
         <p:nvPr/>
       </p:nvGrpSpPr>
-      <p:grpSpPr>
-        <a:xfrm>
-          <a:off x="0" y="0"/>
-          <a:ext cx="0" cy="0"/>
-          <a:chOff x="0" y="0"/>
-          <a:chExt cx="0" cy="0"/>
-        </a:xfrm>
-      </p:grpSpPr>
+      <p:grpSpPr/>
       <p:sp>
         <p:nvSpPr>
           <p:cNvPr id="2" name="Rectangle 1"/>
@@ -3139,7 +3137,6 @@
           <a:lstStyle/>
           <a:p>
             <a:pPr algn="ctr"/>
-            <a:endParaRPr/>
           </a:p>
         </p:txBody>
       </p:sp>
@@ -3184,7 +3181,6 @@
           <a:lstStyle/>
           <a:p>
             <a:pPr algn="ctr"/>
-            <a:endParaRPr/>
           </a:p>
         </p:txBody>
       </p:sp>
@@ -3299,7 +3295,6 @@
           <a:lstStyle/>
           <a:p>
             <a:pPr algn="ctr"/>
-            <a:endParaRPr/>
           </a:p>
         </p:txBody>
       </p:sp>
@@ -3408,7 +3403,7 @@
 </file>
 
 <file path=ppt/slides/slide2.xml><?xml version="1.0" encoding="utf-8"?>
-<p:sld xmlns:a="http://schemas.openxmlformats.org/drawingml/2006/main" xmlns:r="http://schemas.openxmlformats.org/officeDocument/2006/relationships" xmlns:p="http://schemas.openxmlformats.org/presentationml/2006/main">
+<p:sld xmlns:a="http://schemas.openxmlformats.org/drawingml/2006/main" xmlns:p="http://schemas.openxmlformats.org/presentationml/2006/main" xmlns:r="http://schemas.openxmlformats.org/officeDocument/2006/relationships">
   <p:cSld>
     <p:spTree>
       <p:nvGrpSpPr>
@@ -3416,14 +3411,7 @@
         <p:cNvGrpSpPr/>
         <p:nvPr/>
       </p:nvGrpSpPr>
-      <p:grpSpPr>
-        <a:xfrm>
-          <a:off x="0" y="0"/>
-          <a:ext cx="0" cy="0"/>
-          <a:chOff x="0" y="0"/>
-          <a:chExt cx="0" cy="0"/>
-        </a:xfrm>
-      </p:grpSpPr>
+      <p:grpSpPr/>
       <p:sp>
         <p:nvSpPr>
           <p:cNvPr id="2" name="Rectangle 1"/>
@@ -3465,7 +3453,6 @@
           <a:lstStyle/>
           <a:p>
             <a:pPr algn="ctr"/>
-            <a:endParaRPr/>
           </a:p>
         </p:txBody>
       </p:sp>
@@ -3510,7 +3497,6 @@
           <a:lstStyle/>
           <a:p>
             <a:pPr algn="ctr"/>
-            <a:endParaRPr/>
           </a:p>
         </p:txBody>
       </p:sp>
@@ -3625,7 +3611,6 @@
           <a:lstStyle/>
           <a:p>
             <a:pPr algn="ctr"/>
-            <a:endParaRPr/>
           </a:p>
         </p:txBody>
       </p:sp>
@@ -3707,7 +3692,6 @@
           <a:lstStyle/>
           <a:p>
             <a:pPr algn="ctr"/>
-            <a:endParaRPr/>
           </a:p>
         </p:txBody>
       </p:sp>
@@ -3752,7 +3736,6 @@
           <a:lstStyle/>
           <a:p>
             <a:pPr algn="ctr"/>
-            <a:endParaRPr/>
           </a:p>
         </p:txBody>
       </p:sp>
@@ -3904,7 +3887,6 @@
           <a:lstStyle/>
           <a:p>
             <a:pPr algn="ctr"/>
-            <a:endParaRPr/>
           </a:p>
         </p:txBody>
       </p:sp>
@@ -3949,7 +3931,6 @@
           <a:lstStyle/>
           <a:p>
             <a:pPr algn="ctr"/>
-            <a:endParaRPr/>
           </a:p>
         </p:txBody>
       </p:sp>
@@ -4101,7 +4082,6 @@
           <a:lstStyle/>
           <a:p>
             <a:pPr algn="ctr"/>
-            <a:endParaRPr/>
           </a:p>
         </p:txBody>
       </p:sp>
@@ -4146,7 +4126,6 @@
           <a:lstStyle/>
           <a:p>
             <a:pPr algn="ctr"/>
-            <a:endParaRPr/>
           </a:p>
         </p:txBody>
       </p:sp>
@@ -4298,7 +4277,6 @@
           <a:lstStyle/>
           <a:p>
             <a:pPr algn="ctr"/>
-            <a:endParaRPr/>
           </a:p>
         </p:txBody>
       </p:sp>
@@ -4343,7 +4321,6 @@
           <a:lstStyle/>
           <a:p>
             <a:pPr algn="ctr"/>
-            <a:endParaRPr/>
           </a:p>
         </p:txBody>
       </p:sp>
@@ -4467,7 +4444,7 @@
             <a:avLst/>
           </a:prstGeom>
           <a:solidFill>
-            <a:srgbClr val="E2F0EC"/>
+            <a:srgbClr val="FBEAE2"/>
           </a:solidFill>
           <a:ln>
             <a:noFill/>
@@ -4493,7 +4470,6 @@
           <a:lstStyle/>
           <a:p>
             <a:pPr algn="ctr"/>
-            <a:endParaRPr/>
           </a:p>
         </p:txBody>
       </p:sp>
@@ -4512,7 +4488,7 @@
             <a:avLst/>
           </a:prstGeom>
           <a:solidFill>
-            <a:srgbClr val="0E8A78"/>
+            <a:srgbClr val="E2714A"/>
           </a:solidFill>
           <a:ln>
             <a:noFill/>
@@ -4538,7 +4514,6 @@
           <a:lstStyle/>
           <a:p>
             <a:pPr algn="ctr"/>
-            <a:endParaRPr/>
           </a:p>
         </p:txBody>
       </p:sp>
@@ -4575,11 +4550,11 @@
             <a:r>
               <a:rPr sz="1300" b="1">
                 <a:solidFill>
-                  <a:srgbClr val="0E8A78"/>
+                  <a:srgbClr val="E2714A"/>
                 </a:solidFill>
                 <a:latin typeface="Meiryo UI"/>
               </a:rPr>
-              <a:t>自動保存について</a:t>
+              <a:t>⚠️ 自動保存はありません</a:t>
             </a:r>
           </a:p>
           <a:p>
@@ -4598,7 +4573,7 @@
                 </a:solidFill>
                 <a:latin typeface="Meiryo UI"/>
               </a:rPr>
-              <a:t>入力内容は1.2秒後に自動的に保存されます。「保存」ボタンを押さなくても大丈夫です。</a:t>
+              <a:t>入力したら必ず「保存する」ボタンを押してください。未保存の間は「未保存の変更があります」と表示されます。</a:t>
             </a:r>
           </a:p>
         </p:txBody>
@@ -4612,7 +4587,7 @@
 </file>
 
 <file path=ppt/slides/slide3.xml><?xml version="1.0" encoding="utf-8"?>
-<p:sld xmlns:a="http://schemas.openxmlformats.org/drawingml/2006/main" xmlns:r="http://schemas.openxmlformats.org/officeDocument/2006/relationships" xmlns:p="http://schemas.openxmlformats.org/presentationml/2006/main">
+<p:sld xmlns:a="http://schemas.openxmlformats.org/drawingml/2006/main" xmlns:p="http://schemas.openxmlformats.org/presentationml/2006/main" xmlns:r="http://schemas.openxmlformats.org/officeDocument/2006/relationships">
   <p:cSld>
     <p:spTree>
       <p:nvGrpSpPr>
@@ -4620,14 +4595,7 @@
         <p:cNvGrpSpPr/>
         <p:nvPr/>
       </p:nvGrpSpPr>
-      <p:grpSpPr>
-        <a:xfrm>
-          <a:off x="0" y="0"/>
-          <a:ext cx="0" cy="0"/>
-          <a:chOff x="0" y="0"/>
-          <a:chExt cx="0" cy="0"/>
-        </a:xfrm>
-      </p:grpSpPr>
+      <p:grpSpPr/>
       <p:sp>
         <p:nvSpPr>
           <p:cNvPr id="2" name="Rectangle 1"/>
@@ -4669,7 +4637,6 @@
           <a:lstStyle/>
           <a:p>
             <a:pPr algn="ctr"/>
-            <a:endParaRPr/>
           </a:p>
         </p:txBody>
       </p:sp>
@@ -4714,7 +4681,6 @@
           <a:lstStyle/>
           <a:p>
             <a:pPr algn="ctr"/>
-            <a:endParaRPr/>
           </a:p>
         </p:txBody>
       </p:sp>
@@ -4829,7 +4795,6 @@
           <a:lstStyle/>
           <a:p>
             <a:pPr algn="ctr"/>
-            <a:endParaRPr/>
           </a:p>
         </p:txBody>
       </p:sp>
@@ -4909,7 +4874,6 @@
           <a:lstStyle/>
           <a:p>
             <a:pPr algn="ctr"/>
-            <a:endParaRPr/>
           </a:p>
         </p:txBody>
       </p:sp>
@@ -4954,7 +4918,6 @@
           <a:lstStyle/>
           <a:p>
             <a:pPr algn="ctr"/>
-            <a:endParaRPr/>
           </a:p>
         </p:txBody>
       </p:sp>
@@ -5104,7 +5067,6 @@
           <a:lstStyle/>
           <a:p>
             <a:pPr algn="ctr"/>
-            <a:endParaRPr/>
           </a:p>
         </p:txBody>
       </p:sp>
@@ -5184,7 +5146,6 @@
           <a:lstStyle/>
           <a:p>
             <a:pPr algn="ctr"/>
-            <a:endParaRPr/>
           </a:p>
         </p:txBody>
       </p:sp>
@@ -5229,7 +5190,6 @@
           <a:lstStyle/>
           <a:p>
             <a:pPr algn="ctr"/>
-            <a:endParaRPr/>
           </a:p>
         </p:txBody>
       </p:sp>
@@ -5379,7 +5339,6 @@
           <a:lstStyle/>
           <a:p>
             <a:pPr algn="ctr"/>
-            <a:endParaRPr/>
           </a:p>
         </p:txBody>
       </p:sp>
@@ -5437,25 +5396,13 @@
                 <a:tableStyleId>{5C22544A-7EE6-4342-B048-85BDC9FD1C3A}</a:tableStyleId>
               </a:tblPr>
               <a:tblGrid>
-                <a:gridCol w="2743200">
-                  <a:extLst>
-                    <a:ext uri="{9D8B030D-6E8A-4147-A177-3AD203B41FA5}">
-                      <a16:colId xmlns:a16="http://schemas.microsoft.com/office/drawing/2014/main" val="20000"/>
-                    </a:ext>
-                  </a:extLst>
-                </a:gridCol>
-                <a:gridCol w="8138160">
-                  <a:extLst>
-                    <a:ext uri="{9D8B030D-6E8A-4147-A177-3AD203B41FA5}">
-                      <a16:colId xmlns:a16="http://schemas.microsoft.com/office/drawing/2014/main" val="20001"/>
-                    </a:ext>
-                  </a:extLst>
-                </a:gridCol>
+                <a:gridCol w="2743200"/>
+                <a:gridCol w="8138160"/>
               </a:tblGrid>
               <a:tr h="329184">
                 <a:tc>
                   <a:txBody>
-                    <a:bodyPr/>
+                    <a:bodyPr wrap="square"/>
                     <a:lstStyle/>
                     <a:p>
                       <a:pPr algn="l"/>
@@ -5470,7 +5417,7 @@
                       </a:r>
                     </a:p>
                   </a:txBody>
-                  <a:tcPr marR="73152" marT="36576" marB="36576" anchor="ctr">
+                  <a:tcPr anchor="ctr" marL="91440" marR="73152" marT="36576" marB="36576">
                     <a:solidFill>
                       <a:srgbClr val="0E8A78"/>
                     </a:solidFill>
@@ -5478,7 +5425,7 @@
                 </a:tc>
                 <a:tc>
                   <a:txBody>
-                    <a:bodyPr/>
+                    <a:bodyPr wrap="square"/>
                     <a:lstStyle/>
                     <a:p>
                       <a:pPr algn="l"/>
@@ -5493,22 +5440,17 @@
                       </a:r>
                     </a:p>
                   </a:txBody>
-                  <a:tcPr marR="73152" marT="36576" marB="36576" anchor="ctr">
+                  <a:tcPr anchor="ctr" marL="91440" marR="73152" marT="36576" marB="36576">
                     <a:solidFill>
                       <a:srgbClr val="0E8A78"/>
                     </a:solidFill>
                   </a:tcPr>
                 </a:tc>
-                <a:extLst>
-                  <a:ext uri="{0D108BD9-81ED-4DB2-BD59-A6C34878D82A}">
-                    <a16:rowId xmlns:a16="http://schemas.microsoft.com/office/drawing/2014/main" val="10000"/>
-                  </a:ext>
-                </a:extLst>
               </a:tr>
               <a:tr h="329184">
                 <a:tc>
                   <a:txBody>
-                    <a:bodyPr/>
+                    <a:bodyPr wrap="square"/>
                     <a:lstStyle/>
                     <a:p>
                       <a:pPr algn="l"/>
@@ -5523,7 +5465,7 @@
                       </a:r>
                     </a:p>
                   </a:txBody>
-                  <a:tcPr marR="73152" marT="36576" marB="36576" anchor="ctr">
+                  <a:tcPr anchor="ctr" marL="91440" marR="73152" marT="36576" marB="36576">
                     <a:solidFill>
                       <a:srgbClr val="FFFFFF"/>
                     </a:solidFill>
@@ -5531,7 +5473,7 @@
                 </a:tc>
                 <a:tc>
                   <a:txBody>
-                    <a:bodyPr/>
+                    <a:bodyPr wrap="square"/>
                     <a:lstStyle/>
                     <a:p>
                       <a:pPr algn="l"/>
@@ -5546,22 +5488,17 @@
                       </a:r>
                     </a:p>
                   </a:txBody>
-                  <a:tcPr marR="73152" marT="36576" marB="36576" anchor="ctr">
+                  <a:tcPr anchor="ctr" marL="91440" marR="73152" marT="36576" marB="36576">
                     <a:solidFill>
                       <a:srgbClr val="FFFFFF"/>
                     </a:solidFill>
                   </a:tcPr>
                 </a:tc>
-                <a:extLst>
-                  <a:ext uri="{0D108BD9-81ED-4DB2-BD59-A6C34878D82A}">
-                    <a16:rowId xmlns:a16="http://schemas.microsoft.com/office/drawing/2014/main" val="10001"/>
-                  </a:ext>
-                </a:extLst>
               </a:tr>
               <a:tr h="329184">
                 <a:tc>
                   <a:txBody>
-                    <a:bodyPr/>
+                    <a:bodyPr wrap="square"/>
                     <a:lstStyle/>
                     <a:p>
                       <a:pPr algn="l"/>
@@ -5576,7 +5513,7 @@
                       </a:r>
                     </a:p>
                   </a:txBody>
-                  <a:tcPr marR="73152" marT="36576" marB="36576" anchor="ctr">
+                  <a:tcPr anchor="ctr" marL="91440" marR="73152" marT="36576" marB="36576">
                     <a:solidFill>
                       <a:srgbClr val="E2F0EC"/>
                     </a:solidFill>
@@ -5584,7 +5521,7 @@
                 </a:tc>
                 <a:tc>
                   <a:txBody>
-                    <a:bodyPr/>
+                    <a:bodyPr wrap="square"/>
                     <a:lstStyle/>
                     <a:p>
                       <a:pPr algn="l"/>
@@ -5599,22 +5536,17 @@
                       </a:r>
                     </a:p>
                   </a:txBody>
-                  <a:tcPr marR="73152" marT="36576" marB="36576" anchor="ctr">
+                  <a:tcPr anchor="ctr" marL="91440" marR="73152" marT="36576" marB="36576">
                     <a:solidFill>
                       <a:srgbClr val="E2F0EC"/>
                     </a:solidFill>
                   </a:tcPr>
                 </a:tc>
-                <a:extLst>
-                  <a:ext uri="{0D108BD9-81ED-4DB2-BD59-A6C34878D82A}">
-                    <a16:rowId xmlns:a16="http://schemas.microsoft.com/office/drawing/2014/main" val="10002"/>
-                  </a:ext>
-                </a:extLst>
               </a:tr>
               <a:tr h="329184">
                 <a:tc>
                   <a:txBody>
-                    <a:bodyPr/>
+                    <a:bodyPr wrap="square"/>
                     <a:lstStyle/>
                     <a:p>
                       <a:pPr algn="l"/>
@@ -5629,7 +5561,7 @@
                       </a:r>
                     </a:p>
                   </a:txBody>
-                  <a:tcPr marR="73152" marT="36576" marB="36576" anchor="ctr">
+                  <a:tcPr anchor="ctr" marL="91440" marR="73152" marT="36576" marB="36576">
                     <a:solidFill>
                       <a:srgbClr val="FFFFFF"/>
                     </a:solidFill>
@@ -5637,7 +5569,7 @@
                 </a:tc>
                 <a:tc>
                   <a:txBody>
-                    <a:bodyPr/>
+                    <a:bodyPr wrap="square"/>
                     <a:lstStyle/>
                     <a:p>
                       <a:pPr algn="l"/>
@@ -5652,22 +5584,17 @@
                       </a:r>
                     </a:p>
                   </a:txBody>
-                  <a:tcPr marR="73152" marT="36576" marB="36576" anchor="ctr">
+                  <a:tcPr anchor="ctr" marL="91440" marR="73152" marT="36576" marB="36576">
                     <a:solidFill>
                       <a:srgbClr val="FFFFFF"/>
                     </a:solidFill>
                   </a:tcPr>
                 </a:tc>
-                <a:extLst>
-                  <a:ext uri="{0D108BD9-81ED-4DB2-BD59-A6C34878D82A}">
-                    <a16:rowId xmlns:a16="http://schemas.microsoft.com/office/drawing/2014/main" val="10003"/>
-                  </a:ext>
-                </a:extLst>
               </a:tr>
               <a:tr h="329184">
                 <a:tc>
                   <a:txBody>
-                    <a:bodyPr/>
+                    <a:bodyPr wrap="square"/>
                     <a:lstStyle/>
                     <a:p>
                       <a:pPr algn="l"/>
@@ -5682,7 +5609,7 @@
                       </a:r>
                     </a:p>
                   </a:txBody>
-                  <a:tcPr marR="73152" marT="36576" marB="36576" anchor="ctr">
+                  <a:tcPr anchor="ctr" marL="91440" marR="73152" marT="36576" marB="36576">
                     <a:solidFill>
                       <a:srgbClr val="E2F0EC"/>
                     </a:solidFill>
@@ -5690,7 +5617,7 @@
                 </a:tc>
                 <a:tc>
                   <a:txBody>
-                    <a:bodyPr/>
+                    <a:bodyPr wrap="square"/>
                     <a:lstStyle/>
                     <a:p>
                       <a:pPr algn="l"/>
@@ -5705,17 +5632,12 @@
                       </a:r>
                     </a:p>
                   </a:txBody>
-                  <a:tcPr marR="73152" marT="36576" marB="36576" anchor="ctr">
+                  <a:tcPr anchor="ctr" marL="91440" marR="73152" marT="36576" marB="36576">
                     <a:solidFill>
                       <a:srgbClr val="E2F0EC"/>
                     </a:solidFill>
                   </a:tcPr>
                 </a:tc>
-                <a:extLst>
-                  <a:ext uri="{0D108BD9-81ED-4DB2-BD59-A6C34878D82A}">
-                    <a16:rowId xmlns:a16="http://schemas.microsoft.com/office/drawing/2014/main" val="10004"/>
-                  </a:ext>
-                </a:extLst>
               </a:tr>
             </a:tbl>
           </a:graphicData>
@@ -5730,7 +5652,7 @@
 </file>
 
 <file path=ppt/slides/slide4.xml><?xml version="1.0" encoding="utf-8"?>
-<p:sld xmlns:a="http://schemas.openxmlformats.org/drawingml/2006/main" xmlns:r="http://schemas.openxmlformats.org/officeDocument/2006/relationships" xmlns:p="http://schemas.openxmlformats.org/presentationml/2006/main">
+<p:sld xmlns:a="http://schemas.openxmlformats.org/drawingml/2006/main" xmlns:p="http://schemas.openxmlformats.org/presentationml/2006/main" xmlns:r="http://schemas.openxmlformats.org/officeDocument/2006/relationships">
   <p:cSld>
     <p:spTree>
       <p:nvGrpSpPr>
@@ -5738,14 +5660,7 @@
         <p:cNvGrpSpPr/>
         <p:nvPr/>
       </p:nvGrpSpPr>
-      <p:grpSpPr>
-        <a:xfrm>
-          <a:off x="0" y="0"/>
-          <a:ext cx="0" cy="0"/>
-          <a:chOff x="0" y="0"/>
-          <a:chExt cx="0" cy="0"/>
-        </a:xfrm>
-      </p:grpSpPr>
+      <p:grpSpPr/>
       <p:sp>
         <p:nvSpPr>
           <p:cNvPr id="2" name="Rectangle 1"/>
@@ -5787,7 +5702,6 @@
           <a:lstStyle/>
           <a:p>
             <a:pPr algn="ctr"/>
-            <a:endParaRPr/>
           </a:p>
         </p:txBody>
       </p:sp>
@@ -5832,7 +5746,6 @@
           <a:lstStyle/>
           <a:p>
             <a:pPr algn="ctr"/>
-            <a:endParaRPr/>
           </a:p>
         </p:txBody>
       </p:sp>
@@ -5947,7 +5860,6 @@
           <a:lstStyle/>
           <a:p>
             <a:pPr algn="ctr"/>
-            <a:endParaRPr/>
           </a:p>
         </p:txBody>
       </p:sp>
@@ -6029,7 +5941,6 @@
           <a:lstStyle/>
           <a:p>
             <a:pPr algn="ctr"/>
-            <a:endParaRPr/>
           </a:p>
         </p:txBody>
       </p:sp>
@@ -6181,7 +6092,6 @@
           <a:lstStyle/>
           <a:p>
             <a:pPr algn="ctr"/>
-            <a:endParaRPr/>
           </a:p>
         </p:txBody>
       </p:sp>
@@ -6333,7 +6243,6 @@
           <a:lstStyle/>
           <a:p>
             <a:pPr algn="ctr"/>
-            <a:endParaRPr/>
           </a:p>
         </p:txBody>
       </p:sp>
@@ -6437,7 +6346,7 @@
                 </a:solidFill>
                 <a:latin typeface="Meiryo UI"/>
               </a:rPr>
-              <a:t>議事録内容（テキストエリア）を入力します。1.2秒後に自動保存されます。</a:t>
+              <a:t>議事録内容（テキストエリア）を入力し、右上の「保存する」を押します。自動保存はありません。</a:t>
             </a:r>
           </a:p>
         </p:txBody>
@@ -6483,7 +6392,6 @@
           <a:lstStyle/>
           <a:p>
             <a:pPr algn="ctr"/>
-            <a:endParaRPr/>
           </a:p>
         </p:txBody>
       </p:sp>
@@ -6528,7 +6436,6 @@
           <a:lstStyle/>
           <a:p>
             <a:pPr algn="ctr"/>
-            <a:endParaRPr/>
           </a:p>
         </p:txBody>
       </p:sp>
@@ -6634,7 +6541,6 @@
           <a:lstStyle/>
           <a:p>
             <a:pPr algn="ctr"/>
-            <a:endParaRPr/>
           </a:p>
         </p:txBody>
       </p:sp>
@@ -6679,7 +6585,6 @@
           <a:lstStyle/>
           <a:p>
             <a:pPr algn="ctr"/>
-            <a:endParaRPr/>
           </a:p>
         </p:txBody>
       </p:sp>
@@ -6753,7 +6658,7 @@
 </file>
 
 <file path=ppt/slides/slide5.xml><?xml version="1.0" encoding="utf-8"?>
-<p:sld xmlns:a="http://schemas.openxmlformats.org/drawingml/2006/main" xmlns:r="http://schemas.openxmlformats.org/officeDocument/2006/relationships" xmlns:p="http://schemas.openxmlformats.org/presentationml/2006/main">
+<p:sld xmlns:a="http://schemas.openxmlformats.org/drawingml/2006/main" xmlns:p="http://schemas.openxmlformats.org/presentationml/2006/main" xmlns:r="http://schemas.openxmlformats.org/officeDocument/2006/relationships">
   <p:cSld>
     <p:spTree>
       <p:nvGrpSpPr>
@@ -6761,14 +6666,7 @@
         <p:cNvGrpSpPr/>
         <p:nvPr/>
       </p:nvGrpSpPr>
-      <p:grpSpPr>
-        <a:xfrm>
-          <a:off x="0" y="0"/>
-          <a:ext cx="0" cy="0"/>
-          <a:chOff x="0" y="0"/>
-          <a:chExt cx="0" cy="0"/>
-        </a:xfrm>
-      </p:grpSpPr>
+      <p:grpSpPr/>
       <p:sp>
         <p:nvSpPr>
           <p:cNvPr id="2" name="Rectangle 1"/>
@@ -6810,7 +6708,6 @@
           <a:lstStyle/>
           <a:p>
             <a:pPr algn="ctr"/>
-            <a:endParaRPr/>
           </a:p>
         </p:txBody>
       </p:sp>
@@ -6855,7 +6752,6 @@
           <a:lstStyle/>
           <a:p>
             <a:pPr algn="ctr"/>
-            <a:endParaRPr/>
           </a:p>
         </p:txBody>
       </p:sp>
@@ -6970,7 +6866,6 @@
           <a:lstStyle/>
           <a:p>
             <a:pPr algn="ctr"/>
-            <a:endParaRPr/>
           </a:p>
         </p:txBody>
       </p:sp>
@@ -7019,7 +6914,7 @@
         </p:nvGraphicFramePr>
         <p:xfrm>
           <a:off x="640080" y="1691640"/>
-          <a:ext cx="10881360" cy="5321272"/>
+          <a:ext cx="10881360" cy="4800600"/>
         </p:xfrm>
         <a:graphic>
           <a:graphicData uri="http://schemas.openxmlformats.org/drawingml/2006/table">
@@ -7028,32 +6923,14 @@
                 <a:tableStyleId>{5C22544A-7EE6-4342-B048-85BDC9FD1C3A}</a:tableStyleId>
               </a:tblPr>
               <a:tblGrid>
-                <a:gridCol w="2194560">
-                  <a:extLst>
-                    <a:ext uri="{9D8B030D-6E8A-4147-A177-3AD203B41FA5}">
-                      <a16:colId xmlns:a16="http://schemas.microsoft.com/office/drawing/2014/main" val="20000"/>
-                    </a:ext>
-                  </a:extLst>
-                </a:gridCol>
-                <a:gridCol w="5760720">
-                  <a:extLst>
-                    <a:ext uri="{9D8B030D-6E8A-4147-A177-3AD203B41FA5}">
-                      <a16:colId xmlns:a16="http://schemas.microsoft.com/office/drawing/2014/main" val="20001"/>
-                    </a:ext>
-                  </a:extLst>
-                </a:gridCol>
-                <a:gridCol w="2926080">
-                  <a:extLst>
-                    <a:ext uri="{9D8B030D-6E8A-4147-A177-3AD203B41FA5}">
-                      <a16:colId xmlns:a16="http://schemas.microsoft.com/office/drawing/2014/main" val="20002"/>
-                    </a:ext>
-                  </a:extLst>
-                </a:gridCol>
+                <a:gridCol w="2194560"/>
+                <a:gridCol w="5760720"/>
+                <a:gridCol w="2926080"/>
               </a:tblGrid>
               <a:tr h="282388">
                 <a:tc>
                   <a:txBody>
-                    <a:bodyPr/>
+                    <a:bodyPr wrap="square"/>
                     <a:lstStyle/>
                     <a:p>
                       <a:pPr algn="l"/>
@@ -7068,7 +6945,7 @@
                       </a:r>
                     </a:p>
                   </a:txBody>
-                  <a:tcPr marR="73152" marT="36576" marB="36576" anchor="ctr">
+                  <a:tcPr anchor="ctr" marL="91440" marR="73152" marT="36576" marB="36576">
                     <a:solidFill>
                       <a:srgbClr val="0E8A78"/>
                     </a:solidFill>
@@ -7076,7 +6953,7 @@
                 </a:tc>
                 <a:tc>
                   <a:txBody>
-                    <a:bodyPr/>
+                    <a:bodyPr wrap="square"/>
                     <a:lstStyle/>
                     <a:p>
                       <a:pPr algn="l"/>
@@ -7091,7 +6968,7 @@
                       </a:r>
                     </a:p>
                   </a:txBody>
-                  <a:tcPr marR="73152" marT="36576" marB="36576" anchor="ctr">
+                  <a:tcPr anchor="ctr" marL="91440" marR="73152" marT="36576" marB="36576">
                     <a:solidFill>
                       <a:srgbClr val="0E8A78"/>
                     </a:solidFill>
@@ -7099,7 +6976,7 @@
                 </a:tc>
                 <a:tc>
                   <a:txBody>
-                    <a:bodyPr/>
+                    <a:bodyPr wrap="square"/>
                     <a:lstStyle/>
                     <a:p>
                       <a:pPr algn="l"/>
@@ -7114,22 +6991,17 @@
                       </a:r>
                     </a:p>
                   </a:txBody>
-                  <a:tcPr marR="73152" marT="36576" marB="36576" anchor="ctr">
+                  <a:tcPr anchor="ctr" marL="91440" marR="73152" marT="36576" marB="36576">
                     <a:solidFill>
                       <a:srgbClr val="0E8A78"/>
                     </a:solidFill>
                   </a:tcPr>
                 </a:tc>
-                <a:extLst>
-                  <a:ext uri="{0D108BD9-81ED-4DB2-BD59-A6C34878D82A}">
-                    <a16:rowId xmlns:a16="http://schemas.microsoft.com/office/drawing/2014/main" val="10000"/>
-                  </a:ext>
-                </a:extLst>
               </a:tr>
               <a:tr h="282388">
                 <a:tc>
                   <a:txBody>
-                    <a:bodyPr/>
+                    <a:bodyPr wrap="square"/>
                     <a:lstStyle/>
                     <a:p>
                       <a:pPr algn="l"/>
@@ -7144,7 +7016,7 @@
                       </a:r>
                     </a:p>
                   </a:txBody>
-                  <a:tcPr marR="73152" marT="36576" marB="36576" anchor="ctr">
+                  <a:tcPr anchor="ctr" marL="91440" marR="73152" marT="36576" marB="36576">
                     <a:solidFill>
                       <a:srgbClr val="FFFFFF"/>
                     </a:solidFill>
@@ -7152,7 +7024,7 @@
                 </a:tc>
                 <a:tc>
                   <a:txBody>
-                    <a:bodyPr/>
+                    <a:bodyPr wrap="square"/>
                     <a:lstStyle/>
                     <a:p>
                       <a:pPr algn="l"/>
@@ -7167,7 +7039,7 @@
                       </a:r>
                     </a:p>
                   </a:txBody>
-                  <a:tcPr marR="73152" marT="36576" marB="36576" anchor="ctr">
+                  <a:tcPr anchor="ctr" marL="91440" marR="73152" marT="36576" marB="36576">
                     <a:solidFill>
                       <a:srgbClr val="FFFFFF"/>
                     </a:solidFill>
@@ -7175,29 +7047,32 @@
                 </a:tc>
                 <a:tc>
                   <a:txBody>
-                    <a:bodyPr/>
+                    <a:bodyPr wrap="square"/>
                     <a:lstStyle/>
                     <a:p>
                       <a:pPr algn="l"/>
-                      <a:endParaRPr/>
+                      <a:r>
+                        <a:rPr sz="1100" b="0">
+                          <a:solidFill>
+                            <a:srgbClr val="1C2B27"/>
+                          </a:solidFill>
+                          <a:latin typeface="Meiryo UI"/>
+                        </a:rPr>
+                        <a:t/>
+                      </a:r>
                     </a:p>
                   </a:txBody>
-                  <a:tcPr marR="73152" marT="36576" marB="36576" anchor="ctr">
+                  <a:tcPr anchor="ctr" marL="91440" marR="73152" marT="36576" marB="36576">
                     <a:solidFill>
                       <a:srgbClr val="FFFFFF"/>
                     </a:solidFill>
                   </a:tcPr>
                 </a:tc>
-                <a:extLst>
-                  <a:ext uri="{0D108BD9-81ED-4DB2-BD59-A6C34878D82A}">
-                    <a16:rowId xmlns:a16="http://schemas.microsoft.com/office/drawing/2014/main" val="10001"/>
-                  </a:ext>
-                </a:extLst>
               </a:tr>
               <a:tr h="282388">
                 <a:tc>
                   <a:txBody>
-                    <a:bodyPr/>
+                    <a:bodyPr wrap="square"/>
                     <a:lstStyle/>
                     <a:p>
                       <a:pPr algn="l"/>
@@ -7212,7 +7087,7 @@
                       </a:r>
                     </a:p>
                   </a:txBody>
-                  <a:tcPr marR="73152" marT="36576" marB="36576" anchor="ctr">
+                  <a:tcPr anchor="ctr" marL="91440" marR="73152" marT="36576" marB="36576">
                     <a:solidFill>
                       <a:srgbClr val="E2F0EC"/>
                     </a:solidFill>
@@ -7220,7 +7095,7 @@
                 </a:tc>
                 <a:tc>
                   <a:txBody>
-                    <a:bodyPr/>
+                    <a:bodyPr wrap="square"/>
                     <a:lstStyle/>
                     <a:p>
                       <a:pPr algn="l"/>
@@ -7235,7 +7110,7 @@
                       </a:r>
                     </a:p>
                   </a:txBody>
-                  <a:tcPr marR="73152" marT="36576" marB="36576" anchor="ctr">
+                  <a:tcPr anchor="ctr" marL="91440" marR="73152" marT="36576" marB="36576">
                     <a:solidFill>
                       <a:srgbClr val="E2F0EC"/>
                     </a:solidFill>
@@ -7243,7 +7118,7 @@
                 </a:tc>
                 <a:tc>
                   <a:txBody>
-                    <a:bodyPr/>
+                    <a:bodyPr wrap="square"/>
                     <a:lstStyle/>
                     <a:p>
                       <a:pPr algn="l"/>
@@ -7258,22 +7133,17 @@
                       </a:r>
                     </a:p>
                   </a:txBody>
-                  <a:tcPr marR="73152" marT="36576" marB="36576" anchor="ctr">
+                  <a:tcPr anchor="ctr" marL="91440" marR="73152" marT="36576" marB="36576">
                     <a:solidFill>
                       <a:srgbClr val="E2F0EC"/>
                     </a:solidFill>
                   </a:tcPr>
                 </a:tc>
-                <a:extLst>
-                  <a:ext uri="{0D108BD9-81ED-4DB2-BD59-A6C34878D82A}">
-                    <a16:rowId xmlns:a16="http://schemas.microsoft.com/office/drawing/2014/main" val="10002"/>
-                  </a:ext>
-                </a:extLst>
               </a:tr>
               <a:tr h="282388">
                 <a:tc>
                   <a:txBody>
-                    <a:bodyPr/>
+                    <a:bodyPr wrap="square"/>
                     <a:lstStyle/>
                     <a:p>
                       <a:pPr algn="l"/>
@@ -7288,7 +7158,7 @@
                       </a:r>
                     </a:p>
                   </a:txBody>
-                  <a:tcPr marR="73152" marT="36576" marB="36576" anchor="ctr">
+                  <a:tcPr anchor="ctr" marL="91440" marR="73152" marT="36576" marB="36576">
                     <a:solidFill>
                       <a:srgbClr val="FFFFFF"/>
                     </a:solidFill>
@@ -7296,7 +7166,7 @@
                 </a:tc>
                 <a:tc>
                   <a:txBody>
-                    <a:bodyPr/>
+                    <a:bodyPr wrap="square"/>
                     <a:lstStyle/>
                     <a:p>
                       <a:pPr algn="l"/>
@@ -7311,7 +7181,7 @@
                       </a:r>
                     </a:p>
                   </a:txBody>
-                  <a:tcPr marR="73152" marT="36576" marB="36576" anchor="ctr">
+                  <a:tcPr anchor="ctr" marL="91440" marR="73152" marT="36576" marB="36576">
                     <a:solidFill>
                       <a:srgbClr val="FFFFFF"/>
                     </a:solidFill>
@@ -7319,7 +7189,7 @@
                 </a:tc>
                 <a:tc>
                   <a:txBody>
-                    <a:bodyPr/>
+                    <a:bodyPr wrap="square"/>
                     <a:lstStyle/>
                     <a:p>
                       <a:pPr algn="l"/>
@@ -7334,22 +7204,17 @@
                       </a:r>
                     </a:p>
                   </a:txBody>
-                  <a:tcPr marR="73152" marT="36576" marB="36576" anchor="ctr">
+                  <a:tcPr anchor="ctr" marL="91440" marR="73152" marT="36576" marB="36576">
                     <a:solidFill>
                       <a:srgbClr val="FFFFFF"/>
                     </a:solidFill>
                   </a:tcPr>
                 </a:tc>
-                <a:extLst>
-                  <a:ext uri="{0D108BD9-81ED-4DB2-BD59-A6C34878D82A}">
-                    <a16:rowId xmlns:a16="http://schemas.microsoft.com/office/drawing/2014/main" val="10003"/>
-                  </a:ext>
-                </a:extLst>
               </a:tr>
               <a:tr h="282388">
                 <a:tc>
                   <a:txBody>
-                    <a:bodyPr/>
+                    <a:bodyPr wrap="square"/>
                     <a:lstStyle/>
                     <a:p>
                       <a:pPr algn="l"/>
@@ -7364,7 +7229,7 @@
                       </a:r>
                     </a:p>
                   </a:txBody>
-                  <a:tcPr marR="73152" marT="36576" marB="36576" anchor="ctr">
+                  <a:tcPr anchor="ctr" marL="91440" marR="73152" marT="36576" marB="36576">
                     <a:solidFill>
                       <a:srgbClr val="E2F0EC"/>
                     </a:solidFill>
@@ -7372,7 +7237,7 @@
                 </a:tc>
                 <a:tc>
                   <a:txBody>
-                    <a:bodyPr/>
+                    <a:bodyPr wrap="square"/>
                     <a:lstStyle/>
                     <a:p>
                       <a:pPr algn="l"/>
@@ -7387,7 +7252,7 @@
                       </a:r>
                     </a:p>
                   </a:txBody>
-                  <a:tcPr marR="73152" marT="36576" marB="36576" anchor="ctr">
+                  <a:tcPr anchor="ctr" marL="91440" marR="73152" marT="36576" marB="36576">
                     <a:solidFill>
                       <a:srgbClr val="E2F0EC"/>
                     </a:solidFill>
@@ -7395,29 +7260,32 @@
                 </a:tc>
                 <a:tc>
                   <a:txBody>
-                    <a:bodyPr/>
+                    <a:bodyPr wrap="square"/>
                     <a:lstStyle/>
                     <a:p>
                       <a:pPr algn="l"/>
-                      <a:endParaRPr/>
+                      <a:r>
+                        <a:rPr sz="1100" b="0">
+                          <a:solidFill>
+                            <a:srgbClr val="1C2B27"/>
+                          </a:solidFill>
+                          <a:latin typeface="Meiryo UI"/>
+                        </a:rPr>
+                        <a:t/>
+                      </a:r>
                     </a:p>
                   </a:txBody>
-                  <a:tcPr marR="73152" marT="36576" marB="36576" anchor="ctr">
+                  <a:tcPr anchor="ctr" marL="91440" marR="73152" marT="36576" marB="36576">
                     <a:solidFill>
                       <a:srgbClr val="E2F0EC"/>
                     </a:solidFill>
                   </a:tcPr>
                 </a:tc>
-                <a:extLst>
-                  <a:ext uri="{0D108BD9-81ED-4DB2-BD59-A6C34878D82A}">
-                    <a16:rowId xmlns:a16="http://schemas.microsoft.com/office/drawing/2014/main" val="10004"/>
-                  </a:ext>
-                </a:extLst>
               </a:tr>
               <a:tr h="282388">
                 <a:tc>
                   <a:txBody>
-                    <a:bodyPr/>
+                    <a:bodyPr wrap="square"/>
                     <a:lstStyle/>
                     <a:p>
                       <a:pPr algn="l"/>
@@ -7432,7 +7300,7 @@
                       </a:r>
                     </a:p>
                   </a:txBody>
-                  <a:tcPr marR="73152" marT="36576" marB="36576" anchor="ctr">
+                  <a:tcPr anchor="ctr" marL="91440" marR="73152" marT="36576" marB="36576">
                     <a:solidFill>
                       <a:srgbClr val="FFFFFF"/>
                     </a:solidFill>
@@ -7440,7 +7308,7 @@
                 </a:tc>
                 <a:tc>
                   <a:txBody>
-                    <a:bodyPr/>
+                    <a:bodyPr wrap="square"/>
                     <a:lstStyle/>
                     <a:p>
                       <a:pPr algn="l"/>
@@ -7455,7 +7323,7 @@
                       </a:r>
                     </a:p>
                   </a:txBody>
-                  <a:tcPr marR="73152" marT="36576" marB="36576" anchor="ctr">
+                  <a:tcPr anchor="ctr" marL="91440" marR="73152" marT="36576" marB="36576">
                     <a:solidFill>
                       <a:srgbClr val="FFFFFF"/>
                     </a:solidFill>
@@ -7463,29 +7331,32 @@
                 </a:tc>
                 <a:tc>
                   <a:txBody>
-                    <a:bodyPr/>
+                    <a:bodyPr wrap="square"/>
                     <a:lstStyle/>
                     <a:p>
                       <a:pPr algn="l"/>
-                      <a:endParaRPr/>
+                      <a:r>
+                        <a:rPr sz="1100" b="0">
+                          <a:solidFill>
+                            <a:srgbClr val="1C2B27"/>
+                          </a:solidFill>
+                          <a:latin typeface="Meiryo UI"/>
+                        </a:rPr>
+                        <a:t/>
+                      </a:r>
                     </a:p>
                   </a:txBody>
-                  <a:tcPr marR="73152" marT="36576" marB="36576" anchor="ctr">
+                  <a:tcPr anchor="ctr" marL="91440" marR="73152" marT="36576" marB="36576">
                     <a:solidFill>
                       <a:srgbClr val="FFFFFF"/>
                     </a:solidFill>
                   </a:tcPr>
                 </a:tc>
-                <a:extLst>
-                  <a:ext uri="{0D108BD9-81ED-4DB2-BD59-A6C34878D82A}">
-                    <a16:rowId xmlns:a16="http://schemas.microsoft.com/office/drawing/2014/main" val="10005"/>
-                  </a:ext>
-                </a:extLst>
               </a:tr>
               <a:tr h="282388">
                 <a:tc>
                   <a:txBody>
-                    <a:bodyPr/>
+                    <a:bodyPr wrap="square"/>
                     <a:lstStyle/>
                     <a:p>
                       <a:pPr algn="l"/>
@@ -7500,7 +7371,7 @@
                       </a:r>
                     </a:p>
                   </a:txBody>
-                  <a:tcPr marR="73152" marT="36576" marB="36576" anchor="ctr">
+                  <a:tcPr anchor="ctr" marL="91440" marR="73152" marT="36576" marB="36576">
                     <a:solidFill>
                       <a:srgbClr val="E2F0EC"/>
                     </a:solidFill>
@@ -7508,7 +7379,7 @@
                 </a:tc>
                 <a:tc>
                   <a:txBody>
-                    <a:bodyPr/>
+                    <a:bodyPr wrap="square"/>
                     <a:lstStyle/>
                     <a:p>
                       <a:pPr algn="l"/>
@@ -7523,7 +7394,7 @@
                       </a:r>
                     </a:p>
                   </a:txBody>
-                  <a:tcPr marR="73152" marT="36576" marB="36576" anchor="ctr">
+                  <a:tcPr anchor="ctr" marL="91440" marR="73152" marT="36576" marB="36576">
                     <a:solidFill>
                       <a:srgbClr val="E2F0EC"/>
                     </a:solidFill>
@@ -7531,29 +7402,32 @@
                 </a:tc>
                 <a:tc>
                   <a:txBody>
-                    <a:bodyPr/>
+                    <a:bodyPr wrap="square"/>
                     <a:lstStyle/>
                     <a:p>
                       <a:pPr algn="l"/>
-                      <a:endParaRPr/>
+                      <a:r>
+                        <a:rPr sz="1100" b="0">
+                          <a:solidFill>
+                            <a:srgbClr val="1C2B27"/>
+                          </a:solidFill>
+                          <a:latin typeface="Meiryo UI"/>
+                        </a:rPr>
+                        <a:t/>
+                      </a:r>
                     </a:p>
                   </a:txBody>
-                  <a:tcPr marR="73152" marT="36576" marB="36576" anchor="ctr">
+                  <a:tcPr anchor="ctr" marL="91440" marR="73152" marT="36576" marB="36576">
                     <a:solidFill>
                       <a:srgbClr val="E2F0EC"/>
                     </a:solidFill>
                   </a:tcPr>
                 </a:tc>
-                <a:extLst>
-                  <a:ext uri="{0D108BD9-81ED-4DB2-BD59-A6C34878D82A}">
-                    <a16:rowId xmlns:a16="http://schemas.microsoft.com/office/drawing/2014/main" val="10006"/>
-                  </a:ext>
-                </a:extLst>
               </a:tr>
               <a:tr h="282388">
                 <a:tc>
                   <a:txBody>
-                    <a:bodyPr/>
+                    <a:bodyPr wrap="square"/>
                     <a:lstStyle/>
                     <a:p>
                       <a:pPr algn="l"/>
@@ -7568,7 +7442,7 @@
                       </a:r>
                     </a:p>
                   </a:txBody>
-                  <a:tcPr marR="73152" marT="36576" marB="36576" anchor="ctr">
+                  <a:tcPr anchor="ctr" marL="91440" marR="73152" marT="36576" marB="36576">
                     <a:solidFill>
                       <a:srgbClr val="FFFFFF"/>
                     </a:solidFill>
@@ -7576,7 +7450,7 @@
                 </a:tc>
                 <a:tc>
                   <a:txBody>
-                    <a:bodyPr/>
+                    <a:bodyPr wrap="square"/>
                     <a:lstStyle/>
                     <a:p>
                       <a:pPr algn="l"/>
@@ -7591,7 +7465,7 @@
                       </a:r>
                     </a:p>
                   </a:txBody>
-                  <a:tcPr marR="73152" marT="36576" marB="36576" anchor="ctr">
+                  <a:tcPr anchor="ctr" marL="91440" marR="73152" marT="36576" marB="36576">
                     <a:solidFill>
                       <a:srgbClr val="FFFFFF"/>
                     </a:solidFill>
@@ -7599,29 +7473,32 @@
                 </a:tc>
                 <a:tc>
                   <a:txBody>
-                    <a:bodyPr/>
+                    <a:bodyPr wrap="square"/>
                     <a:lstStyle/>
                     <a:p>
                       <a:pPr algn="l"/>
-                      <a:endParaRPr/>
+                      <a:r>
+                        <a:rPr sz="1100" b="0">
+                          <a:solidFill>
+                            <a:srgbClr val="1C2B27"/>
+                          </a:solidFill>
+                          <a:latin typeface="Meiryo UI"/>
+                        </a:rPr>
+                        <a:t/>
+                      </a:r>
                     </a:p>
                   </a:txBody>
-                  <a:tcPr marR="73152" marT="36576" marB="36576" anchor="ctr">
+                  <a:tcPr anchor="ctr" marL="91440" marR="73152" marT="36576" marB="36576">
                     <a:solidFill>
                       <a:srgbClr val="FFFFFF"/>
                     </a:solidFill>
                   </a:tcPr>
                 </a:tc>
-                <a:extLst>
-                  <a:ext uri="{0D108BD9-81ED-4DB2-BD59-A6C34878D82A}">
-                    <a16:rowId xmlns:a16="http://schemas.microsoft.com/office/drawing/2014/main" val="10007"/>
-                  </a:ext>
-                </a:extLst>
               </a:tr>
               <a:tr h="282388">
                 <a:tc>
                   <a:txBody>
-                    <a:bodyPr/>
+                    <a:bodyPr wrap="square"/>
                     <a:lstStyle/>
                     <a:p>
                       <a:pPr algn="l"/>
@@ -7636,7 +7513,7 @@
                       </a:r>
                     </a:p>
                   </a:txBody>
-                  <a:tcPr marR="73152" marT="36576" marB="36576" anchor="ctr">
+                  <a:tcPr anchor="ctr" marL="91440" marR="73152" marT="36576" marB="36576">
                     <a:solidFill>
                       <a:srgbClr val="E2F0EC"/>
                     </a:solidFill>
@@ -7644,7 +7521,7 @@
                 </a:tc>
                 <a:tc>
                   <a:txBody>
-                    <a:bodyPr/>
+                    <a:bodyPr wrap="square"/>
                     <a:lstStyle/>
                     <a:p>
                       <a:pPr algn="l"/>
@@ -7659,7 +7536,7 @@
                       </a:r>
                     </a:p>
                   </a:txBody>
-                  <a:tcPr marR="73152" marT="36576" marB="36576" anchor="ctr">
+                  <a:tcPr anchor="ctr" marL="91440" marR="73152" marT="36576" marB="36576">
                     <a:solidFill>
                       <a:srgbClr val="E2F0EC"/>
                     </a:solidFill>
@@ -7667,29 +7544,32 @@
                 </a:tc>
                 <a:tc>
                   <a:txBody>
-                    <a:bodyPr/>
+                    <a:bodyPr wrap="square"/>
                     <a:lstStyle/>
                     <a:p>
                       <a:pPr algn="l"/>
-                      <a:endParaRPr/>
+                      <a:r>
+                        <a:rPr sz="1100" b="0">
+                          <a:solidFill>
+                            <a:srgbClr val="1C2B27"/>
+                          </a:solidFill>
+                          <a:latin typeface="Meiryo UI"/>
+                        </a:rPr>
+                        <a:t/>
+                      </a:r>
                     </a:p>
                   </a:txBody>
-                  <a:tcPr marR="73152" marT="36576" marB="36576" anchor="ctr">
+                  <a:tcPr anchor="ctr" marL="91440" marR="73152" marT="36576" marB="36576">
                     <a:solidFill>
                       <a:srgbClr val="E2F0EC"/>
                     </a:solidFill>
                   </a:tcPr>
                 </a:tc>
-                <a:extLst>
-                  <a:ext uri="{0D108BD9-81ED-4DB2-BD59-A6C34878D82A}">
-                    <a16:rowId xmlns:a16="http://schemas.microsoft.com/office/drawing/2014/main" val="10008"/>
-                  </a:ext>
-                </a:extLst>
               </a:tr>
               <a:tr h="282388">
                 <a:tc>
                   <a:txBody>
-                    <a:bodyPr/>
+                    <a:bodyPr wrap="square"/>
                     <a:lstStyle/>
                     <a:p>
                       <a:pPr algn="l"/>
@@ -7704,7 +7584,7 @@
                       </a:r>
                     </a:p>
                   </a:txBody>
-                  <a:tcPr marR="73152" marT="36576" marB="36576" anchor="ctr">
+                  <a:tcPr anchor="ctr" marL="91440" marR="73152" marT="36576" marB="36576">
                     <a:solidFill>
                       <a:srgbClr val="FFFFFF"/>
                     </a:solidFill>
@@ -7712,7 +7592,7 @@
                 </a:tc>
                 <a:tc>
                   <a:txBody>
-                    <a:bodyPr/>
+                    <a:bodyPr wrap="square"/>
                     <a:lstStyle/>
                     <a:p>
                       <a:pPr algn="l"/>
@@ -7727,7 +7607,7 @@
                       </a:r>
                     </a:p>
                   </a:txBody>
-                  <a:tcPr marR="73152" marT="36576" marB="36576" anchor="ctr">
+                  <a:tcPr anchor="ctr" marL="91440" marR="73152" marT="36576" marB="36576">
                     <a:solidFill>
                       <a:srgbClr val="FFFFFF"/>
                     </a:solidFill>
@@ -7735,29 +7615,32 @@
                 </a:tc>
                 <a:tc>
                   <a:txBody>
-                    <a:bodyPr/>
+                    <a:bodyPr wrap="square"/>
                     <a:lstStyle/>
                     <a:p>
                       <a:pPr algn="l"/>
-                      <a:endParaRPr/>
+                      <a:r>
+                        <a:rPr sz="1100" b="0">
+                          <a:solidFill>
+                            <a:srgbClr val="1C2B27"/>
+                          </a:solidFill>
+                          <a:latin typeface="Meiryo UI"/>
+                        </a:rPr>
+                        <a:t/>
+                      </a:r>
                     </a:p>
                   </a:txBody>
-                  <a:tcPr marR="73152" marT="36576" marB="36576" anchor="ctr">
+                  <a:tcPr anchor="ctr" marL="91440" marR="73152" marT="36576" marB="36576">
                     <a:solidFill>
                       <a:srgbClr val="FFFFFF"/>
                     </a:solidFill>
                   </a:tcPr>
                 </a:tc>
-                <a:extLst>
-                  <a:ext uri="{0D108BD9-81ED-4DB2-BD59-A6C34878D82A}">
-                    <a16:rowId xmlns:a16="http://schemas.microsoft.com/office/drawing/2014/main" val="10009"/>
-                  </a:ext>
-                </a:extLst>
               </a:tr>
               <a:tr h="282388">
                 <a:tc>
                   <a:txBody>
-                    <a:bodyPr/>
+                    <a:bodyPr wrap="square"/>
                     <a:lstStyle/>
                     <a:p>
                       <a:pPr algn="l"/>
@@ -7772,7 +7655,7 @@
                       </a:r>
                     </a:p>
                   </a:txBody>
-                  <a:tcPr marR="73152" marT="36576" marB="36576" anchor="ctr">
+                  <a:tcPr anchor="ctr" marL="91440" marR="73152" marT="36576" marB="36576">
                     <a:solidFill>
                       <a:srgbClr val="E2F0EC"/>
                     </a:solidFill>
@@ -7780,7 +7663,7 @@
                 </a:tc>
                 <a:tc>
                   <a:txBody>
-                    <a:bodyPr/>
+                    <a:bodyPr wrap="square"/>
                     <a:lstStyle/>
                     <a:p>
                       <a:pPr algn="l"/>
@@ -7795,7 +7678,7 @@
                       </a:r>
                     </a:p>
                   </a:txBody>
-                  <a:tcPr marR="73152" marT="36576" marB="36576" anchor="ctr">
+                  <a:tcPr anchor="ctr" marL="91440" marR="73152" marT="36576" marB="36576">
                     <a:solidFill>
                       <a:srgbClr val="E2F0EC"/>
                     </a:solidFill>
@@ -7803,29 +7686,32 @@
                 </a:tc>
                 <a:tc>
                   <a:txBody>
-                    <a:bodyPr/>
+                    <a:bodyPr wrap="square"/>
                     <a:lstStyle/>
                     <a:p>
                       <a:pPr algn="l"/>
-                      <a:endParaRPr/>
+                      <a:r>
+                        <a:rPr sz="1100" b="0">
+                          <a:solidFill>
+                            <a:srgbClr val="1C2B27"/>
+                          </a:solidFill>
+                          <a:latin typeface="Meiryo UI"/>
+                        </a:rPr>
+                        <a:t/>
+                      </a:r>
                     </a:p>
                   </a:txBody>
-                  <a:tcPr marR="73152" marT="36576" marB="36576" anchor="ctr">
+                  <a:tcPr anchor="ctr" marL="91440" marR="73152" marT="36576" marB="36576">
                     <a:solidFill>
                       <a:srgbClr val="E2F0EC"/>
                     </a:solidFill>
                   </a:tcPr>
                 </a:tc>
-                <a:extLst>
-                  <a:ext uri="{0D108BD9-81ED-4DB2-BD59-A6C34878D82A}">
-                    <a16:rowId xmlns:a16="http://schemas.microsoft.com/office/drawing/2014/main" val="10010"/>
-                  </a:ext>
-                </a:extLst>
               </a:tr>
               <a:tr h="282388">
                 <a:tc>
                   <a:txBody>
-                    <a:bodyPr/>
+                    <a:bodyPr wrap="square"/>
                     <a:lstStyle/>
                     <a:p>
                       <a:pPr algn="l"/>
@@ -7840,7 +7726,7 @@
                       </a:r>
                     </a:p>
                   </a:txBody>
-                  <a:tcPr marR="73152" marT="36576" marB="36576" anchor="ctr">
+                  <a:tcPr anchor="ctr" marL="91440" marR="73152" marT="36576" marB="36576">
                     <a:solidFill>
                       <a:srgbClr val="FFFFFF"/>
                     </a:solidFill>
@@ -7848,7 +7734,7 @@
                 </a:tc>
                 <a:tc>
                   <a:txBody>
-                    <a:bodyPr/>
+                    <a:bodyPr wrap="square"/>
                     <a:lstStyle/>
                     <a:p>
                       <a:pPr algn="l"/>
@@ -7863,7 +7749,7 @@
                       </a:r>
                     </a:p>
                   </a:txBody>
-                  <a:tcPr marR="73152" marT="36576" marB="36576" anchor="ctr">
+                  <a:tcPr anchor="ctr" marL="91440" marR="73152" marT="36576" marB="36576">
                     <a:solidFill>
                       <a:srgbClr val="FFFFFF"/>
                     </a:solidFill>
@@ -7871,7 +7757,7 @@
                 </a:tc>
                 <a:tc>
                   <a:txBody>
-                    <a:bodyPr/>
+                    <a:bodyPr wrap="square"/>
                     <a:lstStyle/>
                     <a:p>
                       <a:pPr algn="l"/>
@@ -7886,22 +7772,17 @@
                       </a:r>
                     </a:p>
                   </a:txBody>
-                  <a:tcPr marR="73152" marT="36576" marB="36576" anchor="ctr">
+                  <a:tcPr anchor="ctr" marL="91440" marR="73152" marT="36576" marB="36576">
                     <a:solidFill>
                       <a:srgbClr val="FFFFFF"/>
                     </a:solidFill>
                   </a:tcPr>
                 </a:tc>
-                <a:extLst>
-                  <a:ext uri="{0D108BD9-81ED-4DB2-BD59-A6C34878D82A}">
-                    <a16:rowId xmlns:a16="http://schemas.microsoft.com/office/drawing/2014/main" val="10011"/>
-                  </a:ext>
-                </a:extLst>
               </a:tr>
               <a:tr h="282388">
                 <a:tc>
                   <a:txBody>
-                    <a:bodyPr/>
+                    <a:bodyPr wrap="square"/>
                     <a:lstStyle/>
                     <a:p>
                       <a:pPr algn="l"/>
@@ -7916,7 +7797,7 @@
                       </a:r>
                     </a:p>
                   </a:txBody>
-                  <a:tcPr marR="73152" marT="36576" marB="36576" anchor="ctr">
+                  <a:tcPr anchor="ctr" marL="91440" marR="73152" marT="36576" marB="36576">
                     <a:solidFill>
                       <a:srgbClr val="E2F0EC"/>
                     </a:solidFill>
@@ -7924,7 +7805,7 @@
                 </a:tc>
                 <a:tc>
                   <a:txBody>
-                    <a:bodyPr/>
+                    <a:bodyPr wrap="square"/>
                     <a:lstStyle/>
                     <a:p>
                       <a:pPr algn="l"/>
@@ -7939,7 +7820,7 @@
                       </a:r>
                     </a:p>
                   </a:txBody>
-                  <a:tcPr marR="73152" marT="36576" marB="36576" anchor="ctr">
+                  <a:tcPr anchor="ctr" marL="91440" marR="73152" marT="36576" marB="36576">
                     <a:solidFill>
                       <a:srgbClr val="E2F0EC"/>
                     </a:solidFill>
@@ -7947,7 +7828,7 @@
                 </a:tc>
                 <a:tc>
                   <a:txBody>
-                    <a:bodyPr/>
+                    <a:bodyPr wrap="square"/>
                     <a:lstStyle/>
                     <a:p>
                       <a:pPr algn="l"/>
@@ -7962,22 +7843,17 @@
                       </a:r>
                     </a:p>
                   </a:txBody>
-                  <a:tcPr marR="73152" marT="36576" marB="36576" anchor="ctr">
+                  <a:tcPr anchor="ctr" marL="91440" marR="73152" marT="36576" marB="36576">
                     <a:solidFill>
                       <a:srgbClr val="E2F0EC"/>
                     </a:solidFill>
                   </a:tcPr>
                 </a:tc>
-                <a:extLst>
-                  <a:ext uri="{0D108BD9-81ED-4DB2-BD59-A6C34878D82A}">
-                    <a16:rowId xmlns:a16="http://schemas.microsoft.com/office/drawing/2014/main" val="10012"/>
-                  </a:ext>
-                </a:extLst>
               </a:tr>
               <a:tr h="282388">
                 <a:tc>
                   <a:txBody>
-                    <a:bodyPr/>
+                    <a:bodyPr wrap="square"/>
                     <a:lstStyle/>
                     <a:p>
                       <a:pPr algn="l"/>
@@ -7992,7 +7868,7 @@
                       </a:r>
                     </a:p>
                   </a:txBody>
-                  <a:tcPr marR="73152" marT="36576" marB="36576" anchor="ctr">
+                  <a:tcPr anchor="ctr" marL="91440" marR="73152" marT="36576" marB="36576">
                     <a:solidFill>
                       <a:srgbClr val="FFFFFF"/>
                     </a:solidFill>
@@ -8000,7 +7876,7 @@
                 </a:tc>
                 <a:tc>
                   <a:txBody>
-                    <a:bodyPr/>
+                    <a:bodyPr wrap="square"/>
                     <a:lstStyle/>
                     <a:p>
                       <a:pPr algn="l"/>
@@ -8015,7 +7891,7 @@
                       </a:r>
                     </a:p>
                   </a:txBody>
-                  <a:tcPr marR="73152" marT="36576" marB="36576" anchor="ctr">
+                  <a:tcPr anchor="ctr" marL="91440" marR="73152" marT="36576" marB="36576">
                     <a:solidFill>
                       <a:srgbClr val="FFFFFF"/>
                     </a:solidFill>
@@ -8023,7 +7899,7 @@
                 </a:tc>
                 <a:tc>
                   <a:txBody>
-                    <a:bodyPr/>
+                    <a:bodyPr wrap="square"/>
                     <a:lstStyle/>
                     <a:p>
                       <a:pPr algn="l"/>
@@ -8038,22 +7914,17 @@
                       </a:r>
                     </a:p>
                   </a:txBody>
-                  <a:tcPr marR="73152" marT="36576" marB="36576" anchor="ctr">
+                  <a:tcPr anchor="ctr" marL="91440" marR="73152" marT="36576" marB="36576">
                     <a:solidFill>
                       <a:srgbClr val="FFFFFF"/>
                     </a:solidFill>
                   </a:tcPr>
                 </a:tc>
-                <a:extLst>
-                  <a:ext uri="{0D108BD9-81ED-4DB2-BD59-A6C34878D82A}">
-                    <a16:rowId xmlns:a16="http://schemas.microsoft.com/office/drawing/2014/main" val="10013"/>
-                  </a:ext>
-                </a:extLst>
               </a:tr>
               <a:tr h="282388">
                 <a:tc>
                   <a:txBody>
-                    <a:bodyPr/>
+                    <a:bodyPr wrap="square"/>
                     <a:lstStyle/>
                     <a:p>
                       <a:pPr algn="l"/>
@@ -8068,7 +7939,7 @@
                       </a:r>
                     </a:p>
                   </a:txBody>
-                  <a:tcPr marR="73152" marT="36576" marB="36576" anchor="ctr">
+                  <a:tcPr anchor="ctr" marL="91440" marR="73152" marT="36576" marB="36576">
                     <a:solidFill>
                       <a:srgbClr val="E2F0EC"/>
                     </a:solidFill>
@@ -8076,7 +7947,7 @@
                 </a:tc>
                 <a:tc>
                   <a:txBody>
-                    <a:bodyPr/>
+                    <a:bodyPr wrap="square"/>
                     <a:lstStyle/>
                     <a:p>
                       <a:pPr algn="l"/>
@@ -8091,7 +7962,7 @@
                       </a:r>
                     </a:p>
                   </a:txBody>
-                  <a:tcPr marR="73152" marT="36576" marB="36576" anchor="ctr">
+                  <a:tcPr anchor="ctr" marL="91440" marR="73152" marT="36576" marB="36576">
                     <a:solidFill>
                       <a:srgbClr val="E2F0EC"/>
                     </a:solidFill>
@@ -8099,7 +7970,7 @@
                 </a:tc>
                 <a:tc>
                   <a:txBody>
-                    <a:bodyPr/>
+                    <a:bodyPr wrap="square"/>
                     <a:lstStyle/>
                     <a:p>
                       <a:pPr algn="l"/>
@@ -8114,22 +7985,17 @@
                       </a:r>
                     </a:p>
                   </a:txBody>
-                  <a:tcPr marR="73152" marT="36576" marB="36576" anchor="ctr">
+                  <a:tcPr anchor="ctr" marL="91440" marR="73152" marT="36576" marB="36576">
                     <a:solidFill>
                       <a:srgbClr val="E2F0EC"/>
                     </a:solidFill>
                   </a:tcPr>
                 </a:tc>
-                <a:extLst>
-                  <a:ext uri="{0D108BD9-81ED-4DB2-BD59-A6C34878D82A}">
-                    <a16:rowId xmlns:a16="http://schemas.microsoft.com/office/drawing/2014/main" val="10014"/>
-                  </a:ext>
-                </a:extLst>
               </a:tr>
               <a:tr h="282388">
                 <a:tc>
                   <a:txBody>
-                    <a:bodyPr/>
+                    <a:bodyPr wrap="square"/>
                     <a:lstStyle/>
                     <a:p>
                       <a:pPr algn="l"/>
@@ -8144,7 +8010,7 @@
                       </a:r>
                     </a:p>
                   </a:txBody>
-                  <a:tcPr marR="73152" marT="36576" marB="36576" anchor="ctr">
+                  <a:tcPr anchor="ctr" marL="91440" marR="73152" marT="36576" marB="36576">
                     <a:solidFill>
                       <a:srgbClr val="FFFFFF"/>
                     </a:solidFill>
@@ -8152,7 +8018,7 @@
                 </a:tc>
                 <a:tc>
                   <a:txBody>
-                    <a:bodyPr/>
+                    <a:bodyPr wrap="square"/>
                     <a:lstStyle/>
                     <a:p>
                       <a:pPr algn="l"/>
@@ -8167,7 +8033,7 @@
                       </a:r>
                     </a:p>
                   </a:txBody>
-                  <a:tcPr marR="73152" marT="36576" marB="36576" anchor="ctr">
+                  <a:tcPr anchor="ctr" marL="91440" marR="73152" marT="36576" marB="36576">
                     <a:solidFill>
                       <a:srgbClr val="FFFFFF"/>
                     </a:solidFill>
@@ -8175,7 +8041,7 @@
                 </a:tc>
                 <a:tc>
                   <a:txBody>
-                    <a:bodyPr/>
+                    <a:bodyPr wrap="square"/>
                     <a:lstStyle/>
                     <a:p>
                       <a:pPr algn="l"/>
@@ -8190,22 +8056,17 @@
                       </a:r>
                     </a:p>
                   </a:txBody>
-                  <a:tcPr marR="73152" marT="36576" marB="36576" anchor="ctr">
+                  <a:tcPr anchor="ctr" marL="91440" marR="73152" marT="36576" marB="36576">
                     <a:solidFill>
                       <a:srgbClr val="FFFFFF"/>
                     </a:solidFill>
                   </a:tcPr>
                 </a:tc>
-                <a:extLst>
-                  <a:ext uri="{0D108BD9-81ED-4DB2-BD59-A6C34878D82A}">
-                    <a16:rowId xmlns:a16="http://schemas.microsoft.com/office/drawing/2014/main" val="10015"/>
-                  </a:ext>
-                </a:extLst>
               </a:tr>
               <a:tr h="282392">
                 <a:tc>
                   <a:txBody>
-                    <a:bodyPr/>
+                    <a:bodyPr wrap="square"/>
                     <a:lstStyle/>
                     <a:p>
                       <a:pPr algn="l"/>
@@ -8220,7 +8081,7 @@
                       </a:r>
                     </a:p>
                   </a:txBody>
-                  <a:tcPr marR="73152" marT="36576" marB="36576" anchor="ctr">
+                  <a:tcPr anchor="ctr" marL="91440" marR="73152" marT="36576" marB="36576">
                     <a:solidFill>
                       <a:srgbClr val="E2F0EC"/>
                     </a:solidFill>
@@ -8228,7 +8089,7 @@
                 </a:tc>
                 <a:tc>
                   <a:txBody>
-                    <a:bodyPr/>
+                    <a:bodyPr wrap="square"/>
                     <a:lstStyle/>
                     <a:p>
                       <a:pPr algn="l"/>
@@ -8243,7 +8104,7 @@
                       </a:r>
                     </a:p>
                   </a:txBody>
-                  <a:tcPr marR="73152" marT="36576" marB="36576" anchor="ctr">
+                  <a:tcPr anchor="ctr" marL="91440" marR="73152" marT="36576" marB="36576">
                     <a:solidFill>
                       <a:srgbClr val="E2F0EC"/>
                     </a:solidFill>
@@ -8251,7 +8112,7 @@
                 </a:tc>
                 <a:tc>
                   <a:txBody>
-                    <a:bodyPr/>
+                    <a:bodyPr wrap="square"/>
                     <a:lstStyle/>
                     <a:p>
                       <a:pPr algn="l"/>
@@ -8266,17 +8127,12 @@
                       </a:r>
                     </a:p>
                   </a:txBody>
-                  <a:tcPr marR="73152" marT="36576" marB="36576" anchor="ctr">
+                  <a:tcPr anchor="ctr" marL="91440" marR="73152" marT="36576" marB="36576">
                     <a:solidFill>
                       <a:srgbClr val="E2F0EC"/>
                     </a:solidFill>
                   </a:tcPr>
                 </a:tc>
-                <a:extLst>
-                  <a:ext uri="{0D108BD9-81ED-4DB2-BD59-A6C34878D82A}">
-                    <a16:rowId xmlns:a16="http://schemas.microsoft.com/office/drawing/2014/main" val="10016"/>
-                  </a:ext>
-                </a:extLst>
               </a:tr>
             </a:tbl>
           </a:graphicData>
@@ -8291,7 +8147,7 @@
 </file>
 
 <file path=ppt/slides/slide6.xml><?xml version="1.0" encoding="utf-8"?>
-<p:sld xmlns:a="http://schemas.openxmlformats.org/drawingml/2006/main" xmlns:r="http://schemas.openxmlformats.org/officeDocument/2006/relationships" xmlns:p="http://schemas.openxmlformats.org/presentationml/2006/main">
+<p:sld xmlns:a="http://schemas.openxmlformats.org/drawingml/2006/main" xmlns:p="http://schemas.openxmlformats.org/presentationml/2006/main" xmlns:r="http://schemas.openxmlformats.org/officeDocument/2006/relationships">
   <p:cSld>
     <p:spTree>
       <p:nvGrpSpPr>
@@ -8299,14 +8155,7 @@
         <p:cNvGrpSpPr/>
         <p:nvPr/>
       </p:nvGrpSpPr>
-      <p:grpSpPr>
-        <a:xfrm>
-          <a:off x="0" y="0"/>
-          <a:ext cx="0" cy="0"/>
-          <a:chOff x="0" y="0"/>
-          <a:chExt cx="0" cy="0"/>
-        </a:xfrm>
-      </p:grpSpPr>
+      <p:grpSpPr/>
       <p:sp>
         <p:nvSpPr>
           <p:cNvPr id="2" name="Rectangle 1"/>
@@ -8348,7 +8197,6 @@
           <a:lstStyle/>
           <a:p>
             <a:pPr algn="ctr"/>
-            <a:endParaRPr/>
           </a:p>
         </p:txBody>
       </p:sp>
@@ -8393,7 +8241,6 @@
           <a:lstStyle/>
           <a:p>
             <a:pPr algn="ctr"/>
-            <a:endParaRPr/>
           </a:p>
         </p:txBody>
       </p:sp>
@@ -8508,7 +8355,6 @@
           <a:lstStyle/>
           <a:p>
             <a:pPr algn="ctr"/>
-            <a:endParaRPr/>
           </a:p>
         </p:txBody>
       </p:sp>
@@ -8588,7 +8434,6 @@
           <a:lstStyle/>
           <a:p>
             <a:pPr algn="ctr"/>
-            <a:endParaRPr/>
           </a:p>
         </p:txBody>
       </p:sp>
@@ -8633,7 +8478,6 @@
           <a:lstStyle/>
           <a:p>
             <a:pPr algn="ctr"/>
-            <a:endParaRPr/>
           </a:p>
         </p:txBody>
       </p:sp>
@@ -8741,7 +8585,6 @@
           <a:lstStyle/>
           <a:p>
             <a:pPr algn="ctr"/>
-            <a:endParaRPr/>
           </a:p>
         </p:txBody>
       </p:sp>
@@ -8786,7 +8629,6 @@
           <a:lstStyle/>
           <a:p>
             <a:pPr algn="ctr"/>
-            <a:endParaRPr/>
           </a:p>
         </p:txBody>
       </p:sp>
@@ -8904,7 +8746,6 @@
           <a:lstStyle/>
           <a:p>
             <a:pPr algn="ctr"/>
-            <a:endParaRPr/>
           </a:p>
         </p:txBody>
       </p:sp>
@@ -8949,7 +8790,6 @@
           <a:lstStyle/>
           <a:p>
             <a:pPr algn="ctr"/>
-            <a:endParaRPr/>
           </a:p>
         </p:txBody>
       </p:sp>
@@ -9067,7 +8907,6 @@
           <a:lstStyle/>
           <a:p>
             <a:pPr algn="ctr"/>
-            <a:endParaRPr/>
           </a:p>
         </p:txBody>
       </p:sp>
@@ -9112,7 +8951,6 @@
           <a:lstStyle/>
           <a:p>
             <a:pPr algn="ctr"/>
-            <a:endParaRPr/>
           </a:p>
         </p:txBody>
       </p:sp>
@@ -9228,7 +9066,6 @@
           <a:lstStyle/>
           <a:p>
             <a:pPr algn="ctr"/>
-            <a:endParaRPr/>
           </a:p>
         </p:txBody>
       </p:sp>
@@ -9273,7 +9110,6 @@
           <a:lstStyle/>
           <a:p>
             <a:pPr algn="ctr"/>
-            <a:endParaRPr/>
           </a:p>
         </p:txBody>
       </p:sp>
@@ -9347,7 +9183,7 @@
 </file>
 
 <file path=ppt/slides/slide7.xml><?xml version="1.0" encoding="utf-8"?>
-<p:sld xmlns:a="http://schemas.openxmlformats.org/drawingml/2006/main" xmlns:r="http://schemas.openxmlformats.org/officeDocument/2006/relationships" xmlns:p="http://schemas.openxmlformats.org/presentationml/2006/main">
+<p:sld xmlns:a="http://schemas.openxmlformats.org/drawingml/2006/main" xmlns:p="http://schemas.openxmlformats.org/presentationml/2006/main" xmlns:r="http://schemas.openxmlformats.org/officeDocument/2006/relationships">
   <p:cSld>
     <p:spTree>
       <p:nvGrpSpPr>
@@ -9355,14 +9191,7 @@
         <p:cNvGrpSpPr/>
         <p:nvPr/>
       </p:nvGrpSpPr>
-      <p:grpSpPr>
-        <a:xfrm>
-          <a:off x="0" y="0"/>
-          <a:ext cx="0" cy="0"/>
-          <a:chOff x="0" y="0"/>
-          <a:chExt cx="0" cy="0"/>
-        </a:xfrm>
-      </p:grpSpPr>
+      <p:grpSpPr/>
       <p:sp>
         <p:nvSpPr>
           <p:cNvPr id="2" name="Rectangle 1"/>
@@ -9404,7 +9233,6 @@
           <a:lstStyle/>
           <a:p>
             <a:pPr algn="ctr"/>
-            <a:endParaRPr/>
           </a:p>
         </p:txBody>
       </p:sp>
@@ -9449,7 +9277,6 @@
           <a:lstStyle/>
           <a:p>
             <a:pPr algn="ctr"/>
-            <a:endParaRPr/>
           </a:p>
         </p:txBody>
       </p:sp>
@@ -9564,7 +9391,6 @@
           <a:lstStyle/>
           <a:p>
             <a:pPr algn="ctr"/>
-            <a:endParaRPr/>
           </a:p>
         </p:txBody>
       </p:sp>
@@ -9644,7 +9470,6 @@
           <a:lstStyle/>
           <a:p>
             <a:pPr algn="ctr"/>
-            <a:endParaRPr/>
           </a:p>
         </p:txBody>
       </p:sp>
@@ -9689,7 +9514,6 @@
           <a:lstStyle/>
           <a:p>
             <a:pPr algn="ctr"/>
-            <a:endParaRPr/>
           </a:p>
         </p:txBody>
       </p:sp>
@@ -9797,7 +9621,6 @@
           <a:lstStyle/>
           <a:p>
             <a:pPr algn="ctr"/>
-            <a:endParaRPr/>
           </a:p>
         </p:txBody>
       </p:sp>
@@ -9842,7 +9665,6 @@
           <a:lstStyle/>
           <a:p>
             <a:pPr algn="ctr"/>
-            <a:endParaRPr/>
           </a:p>
         </p:txBody>
       </p:sp>
@@ -9994,7 +9816,6 @@
           <a:lstStyle/>
           <a:p>
             <a:pPr algn="ctr"/>
-            <a:endParaRPr/>
           </a:p>
         </p:txBody>
       </p:sp>
@@ -10039,7 +9860,6 @@
           <a:lstStyle/>
           <a:p>
             <a:pPr algn="ctr"/>
-            <a:endParaRPr/>
           </a:p>
         </p:txBody>
       </p:sp>
@@ -10189,7 +10009,6 @@
           <a:lstStyle/>
           <a:p>
             <a:pPr algn="ctr"/>
-            <a:endParaRPr/>
           </a:p>
         </p:txBody>
       </p:sp>
@@ -10234,7 +10053,6 @@
           <a:lstStyle/>
           <a:p>
             <a:pPr algn="ctr"/>
-            <a:endParaRPr/>
           </a:p>
         </p:txBody>
       </p:sp>
@@ -10308,7 +10126,7 @@
 </file>
 
 <file path=ppt/slides/slide8.xml><?xml version="1.0" encoding="utf-8"?>
-<p:sld xmlns:a="http://schemas.openxmlformats.org/drawingml/2006/main" xmlns:r="http://schemas.openxmlformats.org/officeDocument/2006/relationships" xmlns:p="http://schemas.openxmlformats.org/presentationml/2006/main">
+<p:sld xmlns:a="http://schemas.openxmlformats.org/drawingml/2006/main" xmlns:p="http://schemas.openxmlformats.org/presentationml/2006/main" xmlns:r="http://schemas.openxmlformats.org/officeDocument/2006/relationships">
   <p:cSld>
     <p:spTree>
       <p:nvGrpSpPr>
@@ -10316,14 +10134,7 @@
         <p:cNvGrpSpPr/>
         <p:nvPr/>
       </p:nvGrpSpPr>
-      <p:grpSpPr>
-        <a:xfrm>
-          <a:off x="0" y="0"/>
-          <a:ext cx="0" cy="0"/>
-          <a:chOff x="0" y="0"/>
-          <a:chExt cx="0" cy="0"/>
-        </a:xfrm>
-      </p:grpSpPr>
+      <p:grpSpPr/>
       <p:sp>
         <p:nvSpPr>
           <p:cNvPr id="2" name="Rectangle 1"/>
@@ -10365,7 +10176,6 @@
           <a:lstStyle/>
           <a:p>
             <a:pPr algn="ctr"/>
-            <a:endParaRPr/>
           </a:p>
         </p:txBody>
       </p:sp>
@@ -10410,7 +10220,6 @@
           <a:lstStyle/>
           <a:p>
             <a:pPr algn="ctr"/>
-            <a:endParaRPr/>
           </a:p>
         </p:txBody>
       </p:sp>
@@ -10525,7 +10334,6 @@
           <a:lstStyle/>
           <a:p>
             <a:pPr algn="ctr"/>
-            <a:endParaRPr/>
           </a:p>
         </p:txBody>
       </p:sp>
@@ -10605,7 +10413,6 @@
           <a:lstStyle/>
           <a:p>
             <a:pPr algn="ctr"/>
-            <a:endParaRPr/>
           </a:p>
         </p:txBody>
       </p:sp>
@@ -10650,7 +10457,6 @@
           <a:lstStyle/>
           <a:p>
             <a:pPr algn="ctr"/>
-            <a:endParaRPr/>
           </a:p>
         </p:txBody>
       </p:sp>
@@ -10734,25 +10540,13 @@
                 <a:tableStyleId>{5C22544A-7EE6-4342-B048-85BDC9FD1C3A}</a:tableStyleId>
               </a:tblPr>
               <a:tblGrid>
-                <a:gridCol w="2743200">
-                  <a:extLst>
-                    <a:ext uri="{9D8B030D-6E8A-4147-A177-3AD203B41FA5}">
-                      <a16:colId xmlns:a16="http://schemas.microsoft.com/office/drawing/2014/main" val="20000"/>
-                    </a:ext>
-                  </a:extLst>
-                </a:gridCol>
-                <a:gridCol w="8138160">
-                  <a:extLst>
-                    <a:ext uri="{9D8B030D-6E8A-4147-A177-3AD203B41FA5}">
-                      <a16:colId xmlns:a16="http://schemas.microsoft.com/office/drawing/2014/main" val="20001"/>
-                    </a:ext>
-                  </a:extLst>
-                </a:gridCol>
+                <a:gridCol w="2743200"/>
+                <a:gridCol w="8138160"/>
               </a:tblGrid>
               <a:tr h="400050">
                 <a:tc>
                   <a:txBody>
-                    <a:bodyPr/>
+                    <a:bodyPr wrap="square"/>
                     <a:lstStyle/>
                     <a:p>
                       <a:pPr algn="l"/>
@@ -10767,7 +10561,7 @@
                       </a:r>
                     </a:p>
                   </a:txBody>
-                  <a:tcPr marR="73152" marT="36576" marB="36576" anchor="ctr">
+                  <a:tcPr anchor="ctr" marL="91440" marR="73152" marT="36576" marB="36576">
                     <a:solidFill>
                       <a:srgbClr val="0E8A78"/>
                     </a:solidFill>
@@ -10775,7 +10569,7 @@
                 </a:tc>
                 <a:tc>
                   <a:txBody>
-                    <a:bodyPr/>
+                    <a:bodyPr wrap="square"/>
                     <a:lstStyle/>
                     <a:p>
                       <a:pPr algn="l"/>
@@ -10790,22 +10584,17 @@
                       </a:r>
                     </a:p>
                   </a:txBody>
-                  <a:tcPr marR="73152" marT="36576" marB="36576" anchor="ctr">
+                  <a:tcPr anchor="ctr" marL="91440" marR="73152" marT="36576" marB="36576">
                     <a:solidFill>
                       <a:srgbClr val="0E8A78"/>
                     </a:solidFill>
                   </a:tcPr>
                 </a:tc>
-                <a:extLst>
-                  <a:ext uri="{0D108BD9-81ED-4DB2-BD59-A6C34878D82A}">
-                    <a16:rowId xmlns:a16="http://schemas.microsoft.com/office/drawing/2014/main" val="10000"/>
-                  </a:ext>
-                </a:extLst>
               </a:tr>
               <a:tr h="400050">
                 <a:tc>
                   <a:txBody>
-                    <a:bodyPr/>
+                    <a:bodyPr wrap="square"/>
                     <a:lstStyle/>
                     <a:p>
                       <a:pPr algn="l"/>
@@ -10820,7 +10609,7 @@
                       </a:r>
                     </a:p>
                   </a:txBody>
-                  <a:tcPr marR="73152" marT="36576" marB="36576" anchor="ctr">
+                  <a:tcPr anchor="ctr" marL="91440" marR="73152" marT="36576" marB="36576">
                     <a:solidFill>
                       <a:srgbClr val="FFFFFF"/>
                     </a:solidFill>
@@ -10828,7 +10617,7 @@
                 </a:tc>
                 <a:tc>
                   <a:txBody>
-                    <a:bodyPr/>
+                    <a:bodyPr wrap="square"/>
                     <a:lstStyle/>
                     <a:p>
                       <a:pPr algn="l"/>
@@ -10843,22 +10632,17 @@
                       </a:r>
                     </a:p>
                   </a:txBody>
-                  <a:tcPr marR="73152" marT="36576" marB="36576" anchor="ctr">
+                  <a:tcPr anchor="ctr" marL="91440" marR="73152" marT="36576" marB="36576">
                     <a:solidFill>
                       <a:srgbClr val="FFFFFF"/>
                     </a:solidFill>
                   </a:tcPr>
                 </a:tc>
-                <a:extLst>
-                  <a:ext uri="{0D108BD9-81ED-4DB2-BD59-A6C34878D82A}">
-                    <a16:rowId xmlns:a16="http://schemas.microsoft.com/office/drawing/2014/main" val="10001"/>
-                  </a:ext>
-                </a:extLst>
               </a:tr>
               <a:tr h="400050">
                 <a:tc>
                   <a:txBody>
-                    <a:bodyPr/>
+                    <a:bodyPr wrap="square"/>
                     <a:lstStyle/>
                     <a:p>
                       <a:pPr algn="l"/>
@@ -10873,7 +10657,7 @@
                       </a:r>
                     </a:p>
                   </a:txBody>
-                  <a:tcPr marR="73152" marT="36576" marB="36576" anchor="ctr">
+                  <a:tcPr anchor="ctr" marL="91440" marR="73152" marT="36576" marB="36576">
                     <a:solidFill>
                       <a:srgbClr val="E2F0EC"/>
                     </a:solidFill>
@@ -10881,7 +10665,7 @@
                 </a:tc>
                 <a:tc>
                   <a:txBody>
-                    <a:bodyPr/>
+                    <a:bodyPr wrap="square"/>
                     <a:lstStyle/>
                     <a:p>
                       <a:pPr algn="l"/>
@@ -10896,22 +10680,17 @@
                       </a:r>
                     </a:p>
                   </a:txBody>
-                  <a:tcPr marR="73152" marT="36576" marB="36576" anchor="ctr">
+                  <a:tcPr anchor="ctr" marL="91440" marR="73152" marT="36576" marB="36576">
                     <a:solidFill>
                       <a:srgbClr val="E2F0EC"/>
                     </a:solidFill>
                   </a:tcPr>
                 </a:tc>
-                <a:extLst>
-                  <a:ext uri="{0D108BD9-81ED-4DB2-BD59-A6C34878D82A}">
-                    <a16:rowId xmlns:a16="http://schemas.microsoft.com/office/drawing/2014/main" val="10002"/>
-                  </a:ext>
-                </a:extLst>
               </a:tr>
               <a:tr h="400050">
                 <a:tc>
                   <a:txBody>
-                    <a:bodyPr/>
+                    <a:bodyPr wrap="square"/>
                     <a:lstStyle/>
                     <a:p>
                       <a:pPr algn="l"/>
@@ -10926,7 +10705,7 @@
                       </a:r>
                     </a:p>
                   </a:txBody>
-                  <a:tcPr marR="73152" marT="36576" marB="36576" anchor="ctr">
+                  <a:tcPr anchor="ctr" marL="91440" marR="73152" marT="36576" marB="36576">
                     <a:solidFill>
                       <a:srgbClr val="FFFFFF"/>
                     </a:solidFill>
@@ -10934,7 +10713,7 @@
                 </a:tc>
                 <a:tc>
                   <a:txBody>
-                    <a:bodyPr/>
+                    <a:bodyPr wrap="square"/>
                     <a:lstStyle/>
                     <a:p>
                       <a:pPr algn="l"/>
@@ -10949,22 +10728,17 @@
                       </a:r>
                     </a:p>
                   </a:txBody>
-                  <a:tcPr marR="73152" marT="36576" marB="36576" anchor="ctr">
+                  <a:tcPr anchor="ctr" marL="91440" marR="73152" marT="36576" marB="36576">
                     <a:solidFill>
                       <a:srgbClr val="FFFFFF"/>
                     </a:solidFill>
                   </a:tcPr>
                 </a:tc>
-                <a:extLst>
-                  <a:ext uri="{0D108BD9-81ED-4DB2-BD59-A6C34878D82A}">
-                    <a16:rowId xmlns:a16="http://schemas.microsoft.com/office/drawing/2014/main" val="10003"/>
-                  </a:ext>
-                </a:extLst>
               </a:tr>
               <a:tr h="400050">
                 <a:tc>
                   <a:txBody>
-                    <a:bodyPr/>
+                    <a:bodyPr wrap="square"/>
                     <a:lstStyle/>
                     <a:p>
                       <a:pPr algn="l"/>
@@ -10979,7 +10753,7 @@
                       </a:r>
                     </a:p>
                   </a:txBody>
-                  <a:tcPr marR="73152" marT="36576" marB="36576" anchor="ctr">
+                  <a:tcPr anchor="ctr" marL="91440" marR="73152" marT="36576" marB="36576">
                     <a:solidFill>
                       <a:srgbClr val="E2F0EC"/>
                     </a:solidFill>
@@ -10987,7 +10761,7 @@
                 </a:tc>
                 <a:tc>
                   <a:txBody>
-                    <a:bodyPr/>
+                    <a:bodyPr wrap="square"/>
                     <a:lstStyle/>
                     <a:p>
                       <a:pPr algn="l"/>
@@ -11002,22 +10776,17 @@
                       </a:r>
                     </a:p>
                   </a:txBody>
-                  <a:tcPr marR="73152" marT="36576" marB="36576" anchor="ctr">
+                  <a:tcPr anchor="ctr" marL="91440" marR="73152" marT="36576" marB="36576">
                     <a:solidFill>
                       <a:srgbClr val="E2F0EC"/>
                     </a:solidFill>
                   </a:tcPr>
                 </a:tc>
-                <a:extLst>
-                  <a:ext uri="{0D108BD9-81ED-4DB2-BD59-A6C34878D82A}">
-                    <a16:rowId xmlns:a16="http://schemas.microsoft.com/office/drawing/2014/main" val="10004"/>
-                  </a:ext>
-                </a:extLst>
               </a:tr>
               <a:tr h="400050">
                 <a:tc>
                   <a:txBody>
-                    <a:bodyPr/>
+                    <a:bodyPr wrap="square"/>
                     <a:lstStyle/>
                     <a:p>
                       <a:pPr algn="l"/>
@@ -11032,7 +10801,7 @@
                       </a:r>
                     </a:p>
                   </a:txBody>
-                  <a:tcPr marR="73152" marT="36576" marB="36576" anchor="ctr">
+                  <a:tcPr anchor="ctr" marL="91440" marR="73152" marT="36576" marB="36576">
                     <a:solidFill>
                       <a:srgbClr val="FFFFFF"/>
                     </a:solidFill>
@@ -11040,7 +10809,7 @@
                 </a:tc>
                 <a:tc>
                   <a:txBody>
-                    <a:bodyPr/>
+                    <a:bodyPr wrap="square"/>
                     <a:lstStyle/>
                     <a:p>
                       <a:pPr algn="l"/>
@@ -11055,22 +10824,17 @@
                       </a:r>
                     </a:p>
                   </a:txBody>
-                  <a:tcPr marR="73152" marT="36576" marB="36576" anchor="ctr">
+                  <a:tcPr anchor="ctr" marL="91440" marR="73152" marT="36576" marB="36576">
                     <a:solidFill>
                       <a:srgbClr val="FFFFFF"/>
                     </a:solidFill>
                   </a:tcPr>
                 </a:tc>
-                <a:extLst>
-                  <a:ext uri="{0D108BD9-81ED-4DB2-BD59-A6C34878D82A}">
-                    <a16:rowId xmlns:a16="http://schemas.microsoft.com/office/drawing/2014/main" val="10005"/>
-                  </a:ext>
-                </a:extLst>
               </a:tr>
               <a:tr h="400050">
                 <a:tc>
                   <a:txBody>
-                    <a:bodyPr/>
+                    <a:bodyPr wrap="square"/>
                     <a:lstStyle/>
                     <a:p>
                       <a:pPr algn="l"/>
@@ -11085,7 +10849,7 @@
                       </a:r>
                     </a:p>
                   </a:txBody>
-                  <a:tcPr marR="73152" marT="36576" marB="36576" anchor="ctr">
+                  <a:tcPr anchor="ctr" marL="91440" marR="73152" marT="36576" marB="36576">
                     <a:solidFill>
                       <a:srgbClr val="E2F0EC"/>
                     </a:solidFill>
@@ -11093,7 +10857,7 @@
                 </a:tc>
                 <a:tc>
                   <a:txBody>
-                    <a:bodyPr/>
+                    <a:bodyPr wrap="square"/>
                     <a:lstStyle/>
                     <a:p>
                       <a:pPr algn="l"/>
@@ -11108,22 +10872,17 @@
                       </a:r>
                     </a:p>
                   </a:txBody>
-                  <a:tcPr marR="73152" marT="36576" marB="36576" anchor="ctr">
+                  <a:tcPr anchor="ctr" marL="91440" marR="73152" marT="36576" marB="36576">
                     <a:solidFill>
                       <a:srgbClr val="E2F0EC"/>
                     </a:solidFill>
                   </a:tcPr>
                 </a:tc>
-                <a:extLst>
-                  <a:ext uri="{0D108BD9-81ED-4DB2-BD59-A6C34878D82A}">
-                    <a16:rowId xmlns:a16="http://schemas.microsoft.com/office/drawing/2014/main" val="10006"/>
-                  </a:ext>
-                </a:extLst>
               </a:tr>
               <a:tr h="400050">
                 <a:tc>
                   <a:txBody>
-                    <a:bodyPr/>
+                    <a:bodyPr wrap="square"/>
                     <a:lstStyle/>
                     <a:p>
                       <a:pPr algn="l"/>
@@ -11138,7 +10897,7 @@
                       </a:r>
                     </a:p>
                   </a:txBody>
-                  <a:tcPr marR="73152" marT="36576" marB="36576" anchor="ctr">
+                  <a:tcPr anchor="ctr" marL="91440" marR="73152" marT="36576" marB="36576">
                     <a:solidFill>
                       <a:srgbClr val="FFFFFF"/>
                     </a:solidFill>
@@ -11146,7 +10905,7 @@
                 </a:tc>
                 <a:tc>
                   <a:txBody>
-                    <a:bodyPr/>
+                    <a:bodyPr wrap="square"/>
                     <a:lstStyle/>
                     <a:p>
                       <a:pPr algn="l"/>
@@ -11161,17 +10920,12 @@
                       </a:r>
                     </a:p>
                   </a:txBody>
-                  <a:tcPr marR="73152" marT="36576" marB="36576" anchor="ctr">
+                  <a:tcPr anchor="ctr" marL="91440" marR="73152" marT="36576" marB="36576">
                     <a:solidFill>
                       <a:srgbClr val="FFFFFF"/>
                     </a:solidFill>
                   </a:tcPr>
                 </a:tc>
-                <a:extLst>
-                  <a:ext uri="{0D108BD9-81ED-4DB2-BD59-A6C34878D82A}">
-                    <a16:rowId xmlns:a16="http://schemas.microsoft.com/office/drawing/2014/main" val="10007"/>
-                  </a:ext>
-                </a:extLst>
               </a:tr>
             </a:tbl>
           </a:graphicData>
@@ -11218,7 +10972,6 @@
           <a:lstStyle/>
           <a:p>
             <a:pPr algn="ctr"/>
-            <a:endParaRPr/>
           </a:p>
         </p:txBody>
       </p:sp>
@@ -11263,7 +11016,6 @@
           <a:lstStyle/>
           <a:p>
             <a:pPr algn="ctr"/>
-            <a:endParaRPr/>
           </a:p>
         </p:txBody>
       </p:sp>
@@ -11337,7 +11089,7 @@
 </file>
 
 <file path=ppt/slides/slide9.xml><?xml version="1.0" encoding="utf-8"?>
-<p:sld xmlns:a="http://schemas.openxmlformats.org/drawingml/2006/main" xmlns:r="http://schemas.openxmlformats.org/officeDocument/2006/relationships" xmlns:p="http://schemas.openxmlformats.org/presentationml/2006/main">
+<p:sld xmlns:a="http://schemas.openxmlformats.org/drawingml/2006/main" xmlns:p="http://schemas.openxmlformats.org/presentationml/2006/main" xmlns:r="http://schemas.openxmlformats.org/officeDocument/2006/relationships">
   <p:cSld>
     <p:spTree>
       <p:nvGrpSpPr>
@@ -11345,14 +11097,7 @@
         <p:cNvGrpSpPr/>
         <p:nvPr/>
       </p:nvGrpSpPr>
-      <p:grpSpPr>
-        <a:xfrm>
-          <a:off x="0" y="0"/>
-          <a:ext cx="0" cy="0"/>
-          <a:chOff x="0" y="0"/>
-          <a:chExt cx="0" cy="0"/>
-        </a:xfrm>
-      </p:grpSpPr>
+      <p:grpSpPr/>
       <p:sp>
         <p:nvSpPr>
           <p:cNvPr id="2" name="Rectangle 1"/>
@@ -11394,7 +11139,6 @@
           <a:lstStyle/>
           <a:p>
             <a:pPr algn="ctr"/>
-            <a:endParaRPr/>
           </a:p>
         </p:txBody>
       </p:sp>
@@ -11439,7 +11183,6 @@
           <a:lstStyle/>
           <a:p>
             <a:pPr algn="ctr"/>
-            <a:endParaRPr/>
           </a:p>
         </p:txBody>
       </p:sp>
@@ -11554,7 +11297,6 @@
           <a:lstStyle/>
           <a:p>
             <a:pPr algn="ctr"/>
-            <a:endParaRPr/>
           </a:p>
         </p:txBody>
       </p:sp>
@@ -11636,7 +11378,6 @@
           <a:lstStyle/>
           <a:p>
             <a:pPr algn="ctr"/>
-            <a:endParaRPr/>
           </a:p>
         </p:txBody>
       </p:sp>
@@ -11681,7 +11422,6 @@
           <a:lstStyle/>
           <a:p>
             <a:pPr algn="ctr"/>
-            <a:endParaRPr/>
           </a:p>
         </p:txBody>
       </p:sp>
@@ -11750,7 +11490,7 @@
                 </a:solidFill>
                 <a:latin typeface="Meiryo UI"/>
               </a:rPr>
-              <a:t>内容を誤って入力・上書きしてしまいました</a:t>
+              <a:t>入力を間違えました。保存前に元に戻せますか？</a:t>
             </a:r>
           </a:p>
         </p:txBody>
@@ -11785,7 +11525,7 @@
                 </a:solidFill>
                 <a:latin typeface="Meiryo UI"/>
               </a:rPr>
-              <a:t>自動保存されてしまった場合、スプレッドシートの「議事録」シートに保存前の内容が残っていることがあります。確認してみてください。</a:t>
+              <a:t>自動保存はないので、保存する前なら「キャンセル」で元の内容に戻せます。保存後に間違いに気づいた場合は、直して再度「保存する」を押してください。</a:t>
             </a:r>
           </a:p>
         </p:txBody>
@@ -11833,7 +11573,6 @@
           <a:lstStyle/>
           <a:p>
             <a:pPr algn="ctr"/>
-            <a:endParaRPr/>
           </a:p>
         </p:txBody>
       </p:sp>
@@ -11878,7 +11617,6 @@
           <a:lstStyle/>
           <a:p>
             <a:pPr algn="ctr"/>
-            <a:endParaRPr/>
           </a:p>
         </p:txBody>
       </p:sp>
@@ -12030,7 +11768,6 @@
           <a:lstStyle/>
           <a:p>
             <a:pPr algn="ctr"/>
-            <a:endParaRPr/>
           </a:p>
         </p:txBody>
       </p:sp>
@@ -12075,7 +11812,6 @@
           <a:lstStyle/>
           <a:p>
             <a:pPr algn="ctr"/>
-            <a:endParaRPr/>
           </a:p>
         </p:txBody>
       </p:sp>
@@ -12227,7 +11963,6 @@
           <a:lstStyle/>
           <a:p>
             <a:pPr algn="ctr"/>
-            <a:endParaRPr/>
           </a:p>
         </p:txBody>
       </p:sp>
@@ -12272,7 +12007,6 @@
           <a:lstStyle/>
           <a:p>
             <a:pPr algn="ctr"/>
-            <a:endParaRPr/>
           </a:p>
         </p:txBody>
       </p:sp>
@@ -12424,7 +12158,6 @@
           <a:lstStyle/>
           <a:p>
             <a:pPr algn="ctr"/>
-            <a:endParaRPr/>
           </a:p>
         </p:txBody>
       </p:sp>
@@ -12469,7 +12202,6 @@
           <a:lstStyle/>
           <a:p>
             <a:pPr algn="ctr"/>
-            <a:endParaRPr/>
           </a:p>
         </p:txBody>
       </p:sp>
